--- a/運用/スライド/説明会_20260916.pptx
+++ b/運用/スライド/説明会_20260916.pptx
@@ -5712,7 +5712,7 @@
                 <a:ea typeface="Yu Gothic" pitchFamily="34" charset="-122"/>
                 <a:cs typeface="Yu Gothic" pitchFamily="34" charset="-120"/>
               </a:rPr>
-              <a:t>そこが、6ヶ月かけて言葉にしていくところです。</a:t>
+              <a:t>そこが、講座で言葉にしていくところです。</a:t>
             </a:r>
             <a:endParaRPr lang="en-US" sz="1400" dirty="0"/>
           </a:p>
@@ -5890,7 +5890,7 @@
                 <a:ea typeface="Yu Gothic" pitchFamily="34" charset="-122"/>
                 <a:cs typeface="Yu Gothic" pitchFamily="34" charset="-120"/>
               </a:rPr>
-              <a:t>ファッション起業AIマスター講座</a:t>
+              <a:t>2026年10月13日（火）開講</a:t>
             </a:r>
             <a:endParaRPr lang="en-US" sz="1400" dirty="0"/>
           </a:p>
@@ -5910,7 +5910,7 @@
                 <a:ea typeface="Yu Gothic" pitchFamily="34" charset="-122"/>
                 <a:cs typeface="Yu Gothic" pitchFamily="34" charset="-120"/>
               </a:rPr>
-              <a:t>2026年10月15日 開講</a:t>
+              <a:t>講座は2つあります</a:t>
             </a:r>
             <a:endParaRPr lang="en-US" sz="1400" dirty="0"/>
           </a:p>
@@ -5981,7 +5981,7 @@
                 <a:ea typeface="Yu Gothic" pitchFamily="34" charset="-122"/>
                 <a:cs typeface="Yu Gothic" pitchFamily="34" charset="-120"/>
               </a:rPr>
-              <a:t>この6ヶ月で学ぶこと</a:t>
+              <a:t>講座で学ぶこと</a:t>
             </a:r>
             <a:endParaRPr lang="en-US" sz="2900" dirty="0"/>
           </a:p>
@@ -6568,7 +6568,7 @@
                 <a:ea typeface="Yu Gothic" pitchFamily="34" charset="-122"/>
                 <a:cs typeface="Yu Gothic" pitchFamily="34" charset="-120"/>
               </a:rPr>
-              <a:t>6ヶ月でつくる、あなたの動線</a:t>
+              <a:t>つくるのは、あなたの動線</a:t>
             </a:r>
             <a:endParaRPr lang="en-US" sz="2900" dirty="0"/>
           </a:p>
@@ -8162,7 +8162,7 @@
                 <a:ea typeface="Yu Gothic" pitchFamily="34" charset="-122"/>
                 <a:cs typeface="Yu Gothic" pitchFamily="34" charset="-120"/>
               </a:rPr>
-              <a:t>6ヶ月かかります</a:t>
+              <a:t>時間がかかります</a:t>
             </a:r>
             <a:endParaRPr lang="en-US" sz="1400" dirty="0"/>
           </a:p>
@@ -8372,7 +8372,7 @@
                 <a:ea typeface="Yu Gothic" pitchFamily="34" charset="-122"/>
                 <a:cs typeface="Yu Gothic" pitchFamily="34" charset="-120"/>
               </a:rPr>
-              <a:t>違うのは、2つだけです</a:t>
+              <a:t>講座は2つあります</a:t>
             </a:r>
             <a:endParaRPr lang="en-US" sz="2900" dirty="0"/>
           </a:p>
@@ -8401,9 +8401,9 @@
             <a:tbl>
               <a:tblPr/>
               <a:tblGrid>
+                <a:gridCol w="2103120"/>
                 <a:gridCol w="2651760"/>
-                <a:gridCol w="2688336"/>
-                <a:gridCol w="2670048"/>
+                <a:gridCol w="3255264"/>
               </a:tblGrid>
               <a:tr h="384048">
                 <a:tc>
@@ -8480,7 +8480,28 @@
                           <a:ea typeface="Yu Gothic" pitchFamily="34" charset="-122"/>
                           <a:cs typeface="Yu Gothic" pitchFamily="34" charset="-120"/>
                         </a:rPr>
-                        <a:t>レギュラー</a:t>
+                        <a:t>AIマーケティング</a:t>
+                      </a:r>
+                      <a:endParaRPr lang="en-US" sz="1200" dirty="0">
+                        <a:latin typeface="Yu Gothic" charset="0"/>
+                        <a:ea typeface="Yu Gothic" charset="0"/>
+                        <a:cs typeface="Yu Gothic" charset="0"/>
+                      </a:endParaRPr>
+                    </a:p>
+                    <a:p>
+                      <a:pPr algn="ctr" indent="0" marL="0">
+                        <a:buNone/>
+                      </a:pPr>
+                      <a:r>
+                        <a:rPr lang="en-US" sz="1200" b="1" dirty="0">
+                          <a:solidFill>
+                            <a:srgbClr val="FFFFFF"/>
+                          </a:solidFill>
+                          <a:latin typeface="Yu Gothic" pitchFamily="34" charset="0"/>
+                          <a:ea typeface="Yu Gothic" pitchFamily="34" charset="-122"/>
+                          <a:cs typeface="Yu Gothic" pitchFamily="34" charset="-120"/>
+                        </a:rPr>
+                        <a:t>集中講座</a:t>
                       </a:r>
                       <a:endParaRPr lang="en-US" sz="1200" dirty="0">
                         <a:latin typeface="Yu Gothic" charset="0"/>
@@ -8548,7 +8569,28 @@
                           <a:ea typeface="Yu Gothic" pitchFamily="34" charset="-122"/>
                           <a:cs typeface="Yu Gothic" pitchFamily="34" charset="-120"/>
                         </a:rPr>
-                        <a:t>VIP</a:t>
+                        <a:t>ファッション起業</a:t>
+                      </a:r>
+                      <a:endParaRPr lang="en-US" sz="1200" dirty="0">
+                        <a:latin typeface="Yu Gothic" charset="0"/>
+                        <a:ea typeface="Yu Gothic" charset="0"/>
+                        <a:cs typeface="Yu Gothic" charset="0"/>
+                      </a:endParaRPr>
+                    </a:p>
+                    <a:p>
+                      <a:pPr algn="ctr" indent="0" marL="0">
+                        <a:buNone/>
+                      </a:pPr>
+                      <a:r>
+                        <a:rPr lang="en-US" sz="1200" b="1" dirty="0">
+                          <a:solidFill>
+                            <a:srgbClr val="FFFFFF"/>
+                          </a:solidFill>
+                          <a:latin typeface="Yu Gothic" pitchFamily="34" charset="0"/>
+                          <a:ea typeface="Yu Gothic" pitchFamily="34" charset="-122"/>
+                          <a:cs typeface="Yu Gothic" pitchFamily="34" charset="-120"/>
+                        </a:rPr>
+                        <a:t>AIマスター講座</a:t>
                       </a:r>
                       <a:endParaRPr lang="en-US" sz="1200" dirty="0">
                         <a:latin typeface="Yu Gothic" charset="0"/>
@@ -8618,7 +8660,7 @@
                           <a:ea typeface="Yu Gothic" pitchFamily="34" charset="-122"/>
                           <a:cs typeface="Yu Gothic" pitchFamily="34" charset="-120"/>
                         </a:rPr>
-                        <a:t>講座（月1回・計6回）</a:t>
+                        <a:t>期間</a:t>
                       </a:r>
                       <a:endParaRPr lang="en-US" sz="1200" dirty="0">
                         <a:latin typeface="Yu Gothic" charset="0"/>
@@ -8683,28 +8725,7 @@
                           <a:ea typeface="Yu Gothic" pitchFamily="34" charset="-122"/>
                           <a:cs typeface="Yu Gothic" pitchFamily="34" charset="-120"/>
                         </a:rPr>
-                        <a:t>1・4ヶ月目はハイブリッド</a:t>
-                      </a:r>
-                      <a:endParaRPr lang="en-US" sz="1200" dirty="0">
-                        <a:latin typeface="Yu Gothic" charset="0"/>
-                        <a:ea typeface="Yu Gothic" charset="0"/>
-                        <a:cs typeface="Yu Gothic" charset="0"/>
-                      </a:endParaRPr>
-                    </a:p>
-                    <a:p>
-                      <a:pPr indent="0" marL="0">
-                        <a:buNone/>
-                      </a:pPr>
-                      <a:r>
-                        <a:rPr lang="en-US" sz="1200" dirty="0">
-                          <a:solidFill>
-                            <a:srgbClr val="2B2B2B"/>
-                          </a:solidFill>
-                          <a:latin typeface="Yu Gothic" pitchFamily="34" charset="0"/>
-                          <a:ea typeface="Yu Gothic" pitchFamily="34" charset="-122"/>
-                          <a:cs typeface="Yu Gothic" pitchFamily="34" charset="-120"/>
-                        </a:rPr>
-                        <a:t>ほかはオンライン</a:t>
+                        <a:t>3ヶ月</a:t>
                       </a:r>
                       <a:endParaRPr lang="en-US" sz="1200" dirty="0">
                         <a:latin typeface="Yu Gothic" charset="0"/>
@@ -8769,7 +8790,7 @@
                           <a:ea typeface="Yu Gothic" pitchFamily="34" charset="-122"/>
                           <a:cs typeface="Yu Gothic" pitchFamily="34" charset="-120"/>
                         </a:rPr>
-                        <a:t>毎月すべて対面（東京）</a:t>
+                        <a:t>6ヶ月</a:t>
                       </a:r>
                       <a:endParaRPr lang="en-US" sz="1200" dirty="0">
                         <a:latin typeface="Yu Gothic" charset="0"/>
@@ -8836,7 +8857,7 @@
                           <a:ea typeface="Yu Gothic" pitchFamily="34" charset="-122"/>
                           <a:cs typeface="Yu Gothic" pitchFamily="34" charset="-120"/>
                         </a:rPr>
-                        <a:t>質問会（月1回・計6回）</a:t>
+                        <a:t>オンライン講座</a:t>
                       </a:r>
                       <a:endParaRPr lang="en-US" sz="1200" dirty="0">
                         <a:latin typeface="Yu Gothic" charset="0"/>
@@ -8901,7 +8922,7 @@
                           <a:ea typeface="Yu Gothic" pitchFamily="34" charset="-122"/>
                           <a:cs typeface="Yu Gothic" pitchFamily="34" charset="-120"/>
                         </a:rPr>
-                        <a:t>オンライン・合同</a:t>
+                        <a:t>6回（60分／回）</a:t>
                       </a:r>
                       <a:endParaRPr lang="en-US" sz="1200" dirty="0">
                         <a:latin typeface="Yu Gothic" charset="0"/>
@@ -8966,7 +8987,7 @@
                           <a:ea typeface="Yu Gothic" pitchFamily="34" charset="-122"/>
                           <a:cs typeface="Yu Gothic" pitchFamily="34" charset="-120"/>
                         </a:rPr>
-                        <a:t>オンライン・合同</a:t>
+                        <a:t>8回（90分／回）</a:t>
                       </a:r>
                       <a:endParaRPr lang="en-US" sz="1200" dirty="0">
                         <a:latin typeface="Yu Gothic" charset="0"/>
@@ -9033,7 +9054,7 @@
                           <a:ea typeface="Yu Gothic" pitchFamily="34" charset="-122"/>
                           <a:cs typeface="Yu Gothic" pitchFamily="34" charset="-120"/>
                         </a:rPr>
-                        <a:t>個別のZoom対応</a:t>
+                        <a:t>対面ワークショップ</a:t>
                       </a:r>
                       <a:endParaRPr lang="en-US" sz="1200" dirty="0">
                         <a:latin typeface="Yu Gothic" charset="0"/>
@@ -9098,7 +9119,7 @@
                           <a:ea typeface="Yu Gothic" pitchFamily="34" charset="-122"/>
                           <a:cs typeface="Yu Gothic" pitchFamily="34" charset="-120"/>
                         </a:rPr>
-                        <a:t>契約後すぐ／最終月の2回</a:t>
+                        <a:t>—</a:t>
                       </a:r>
                       <a:endParaRPr lang="en-US" sz="1200" dirty="0">
                         <a:latin typeface="Yu Gothic" charset="0"/>
@@ -9163,7 +9184,7 @@
                           <a:ea typeface="Yu Gothic" pitchFamily="34" charset="-122"/>
                           <a:cs typeface="Yu Gothic" pitchFamily="34" charset="-120"/>
                         </a:rPr>
-                        <a:t>随時</a:t>
+                        <a:t>3回（1回3時間程度・東京）</a:t>
                       </a:r>
                       <a:endParaRPr lang="en-US" sz="1200" dirty="0">
                         <a:latin typeface="Yu Gothic" charset="0"/>
@@ -9230,7 +9251,7 @@
                           <a:ea typeface="Yu Gothic" pitchFamily="34" charset="-122"/>
                           <a:cs typeface="Yu Gothic" pitchFamily="34" charset="-120"/>
                         </a:rPr>
-                        <a:t>チャットサポート</a:t>
+                        <a:t>個別のサポート</a:t>
                       </a:r>
                       <a:endParaRPr lang="en-US" sz="1200" dirty="0">
                         <a:latin typeface="Yu Gothic" charset="0"/>
@@ -9295,7 +9316,7 @@
                           <a:ea typeface="Yu Gothic" pitchFamily="34" charset="-122"/>
                           <a:cs typeface="Yu Gothic" pitchFamily="34" charset="-120"/>
                         </a:rPr>
-                        <a:t>無制限</a:t>
+                        <a:t>個別面談 1回</a:t>
                       </a:r>
                       <a:endParaRPr lang="en-US" sz="1200" dirty="0">
                         <a:latin typeface="Yu Gothic" charset="0"/>
@@ -9360,7 +9381,7 @@
                           <a:ea typeface="Yu Gothic" pitchFamily="34" charset="-122"/>
                           <a:cs typeface="Yu Gothic" pitchFamily="34" charset="-120"/>
                         </a:rPr>
-                        <a:t>無制限</a:t>
+                        <a:t>事前・事後の個別サポート</a:t>
                       </a:r>
                       <a:endParaRPr lang="en-US" sz="1200" dirty="0">
                         <a:latin typeface="Yu Gothic" charset="0"/>
@@ -9427,7 +9448,7 @@
                           <a:ea typeface="Yu Gothic" pitchFamily="34" charset="-122"/>
                           <a:cs typeface="Yu Gothic" pitchFamily="34" charset="-120"/>
                         </a:rPr>
-                        <a:t>ランチ会</a:t>
+                        <a:t>質問</a:t>
                       </a:r>
                       <a:endParaRPr lang="en-US" sz="1200" dirty="0">
                         <a:latin typeface="Yu Gothic" charset="0"/>
@@ -9492,7 +9513,7 @@
                           <a:ea typeface="Yu Gothic" pitchFamily="34" charset="-122"/>
                           <a:cs typeface="Yu Gothic" pitchFamily="34" charset="-120"/>
                         </a:rPr>
-                        <a:t>4ヶ月目・合同</a:t>
+                        <a:t>質問し放題</a:t>
                       </a:r>
                       <a:endParaRPr lang="en-US" sz="1200" dirty="0">
                         <a:latin typeface="Yu Gothic" charset="0"/>
@@ -9557,7 +9578,204 @@
                           <a:ea typeface="Yu Gothic" pitchFamily="34" charset="-122"/>
                           <a:cs typeface="Yu Gothic" pitchFamily="34" charset="-120"/>
                         </a:rPr>
-                        <a:t>4ヶ月目・合同</a:t>
+                        <a:t>チャットサポート</a:t>
+                      </a:r>
+                      <a:endParaRPr lang="en-US" sz="1200" dirty="0">
+                        <a:latin typeface="Yu Gothic" charset="0"/>
+                        <a:ea typeface="Yu Gothic" charset="0"/>
+                        <a:cs typeface="Yu Gothic" charset="0"/>
+                      </a:endParaRPr>
+                    </a:p>
+                  </a:txBody>
+                  <a:tcPr marL="76200" marR="76200" marT="76200" marB="76200" anchor="ctr">
+                    <a:lnL w="6350" cap="flat" cmpd="sng" algn="ctr">
+                      <a:solidFill>
+                        <a:srgbClr val="DDD5D2"/>
+                      </a:solidFill>
+                      <a:prstDash val="solid"/>
+                      <a:round/>
+                      <a:headEnd type="none" w="med" len="med"/>
+                      <a:tailEnd type="none" w="med" len="med"/>
+                    </a:lnL>
+                    <a:lnR w="6350" cap="flat" cmpd="sng" algn="ctr">
+                      <a:solidFill>
+                        <a:srgbClr val="DDD5D2"/>
+                      </a:solidFill>
+                      <a:prstDash val="solid"/>
+                      <a:round/>
+                      <a:headEnd type="none" w="med" len="med"/>
+                      <a:tailEnd type="none" w="med" len="med"/>
+                    </a:lnR>
+                    <a:lnT w="6350" cap="flat" cmpd="sng" algn="ctr">
+                      <a:solidFill>
+                        <a:srgbClr val="DDD5D2"/>
+                      </a:solidFill>
+                      <a:prstDash val="solid"/>
+                      <a:round/>
+                      <a:headEnd type="none" w="med" len="med"/>
+                      <a:tailEnd type="none" w="med" len="med"/>
+                    </a:lnT>
+                    <a:lnB w="6350" cap="flat" cmpd="sng" algn="ctr">
+                      <a:solidFill>
+                        <a:srgbClr val="DDD5D2"/>
+                      </a:solidFill>
+                      <a:prstDash val="solid"/>
+                      <a:round/>
+                      <a:headEnd type="none" w="med" len="med"/>
+                      <a:tailEnd type="none" w="med" len="med"/>
+                    </a:lnB>
+                  </a:tcPr>
+                </a:tc>
+              </a:tr>
+              <a:tr h="384048">
+                <a:tc>
+                  <a:txBody>
+                    <a:bodyPr/>
+                    <a:lstStyle/>
+                    <a:p>
+                      <a:pPr indent="0" marL="0">
+                        <a:buNone/>
+                      </a:pPr>
+                      <a:r>
+                        <a:rPr lang="en-US" sz="1200" dirty="0">
+                          <a:solidFill>
+                            <a:srgbClr val="2B2B2B"/>
+                          </a:solidFill>
+                          <a:latin typeface="Yu Gothic" pitchFamily="34" charset="0"/>
+                          <a:ea typeface="Yu Gothic" pitchFamily="34" charset="-122"/>
+                          <a:cs typeface="Yu Gothic" pitchFamily="34" charset="-120"/>
+                        </a:rPr>
+                        <a:t>会員サイト</a:t>
+                      </a:r>
+                      <a:endParaRPr lang="en-US" sz="1200" dirty="0">
+                        <a:latin typeface="Yu Gothic" charset="0"/>
+                        <a:ea typeface="Yu Gothic" charset="0"/>
+                        <a:cs typeface="Yu Gothic" charset="0"/>
+                      </a:endParaRPr>
+                    </a:p>
+                  </a:txBody>
+                  <a:tcPr marL="76200" marR="76200" marT="76200" marB="76200" anchor="ctr">
+                    <a:lnL w="6350" cap="flat" cmpd="sng" algn="ctr">
+                      <a:solidFill>
+                        <a:srgbClr val="DDD5D2"/>
+                      </a:solidFill>
+                      <a:prstDash val="solid"/>
+                      <a:round/>
+                      <a:headEnd type="none" w="med" len="med"/>
+                      <a:tailEnd type="none" w="med" len="med"/>
+                    </a:lnL>
+                    <a:lnR w="6350" cap="flat" cmpd="sng" algn="ctr">
+                      <a:solidFill>
+                        <a:srgbClr val="DDD5D2"/>
+                      </a:solidFill>
+                      <a:prstDash val="solid"/>
+                      <a:round/>
+                      <a:headEnd type="none" w="med" len="med"/>
+                      <a:tailEnd type="none" w="med" len="med"/>
+                    </a:lnR>
+                    <a:lnT w="6350" cap="flat" cmpd="sng" algn="ctr">
+                      <a:solidFill>
+                        <a:srgbClr val="DDD5D2"/>
+                      </a:solidFill>
+                      <a:prstDash val="solid"/>
+                      <a:round/>
+                      <a:headEnd type="none" w="med" len="med"/>
+                      <a:tailEnd type="none" w="med" len="med"/>
+                    </a:lnT>
+                    <a:lnB w="6350" cap="flat" cmpd="sng" algn="ctr">
+                      <a:solidFill>
+                        <a:srgbClr val="DDD5D2"/>
+                      </a:solidFill>
+                      <a:prstDash val="solid"/>
+                      <a:round/>
+                      <a:headEnd type="none" w="med" len="med"/>
+                      <a:tailEnd type="none" w="med" len="med"/>
+                    </a:lnB>
+                  </a:tcPr>
+                </a:tc>
+                <a:tc>
+                  <a:txBody>
+                    <a:bodyPr/>
+                    <a:lstStyle/>
+                    <a:p>
+                      <a:pPr indent="0" marL="0">
+                        <a:buNone/>
+                      </a:pPr>
+                      <a:r>
+                        <a:rPr lang="en-US" sz="1200" dirty="0">
+                          <a:solidFill>
+                            <a:srgbClr val="2B2B2B"/>
+                          </a:solidFill>
+                          <a:latin typeface="Yu Gothic" pitchFamily="34" charset="0"/>
+                          <a:ea typeface="Yu Gothic" pitchFamily="34" charset="-122"/>
+                          <a:cs typeface="Yu Gothic" pitchFamily="34" charset="-120"/>
+                        </a:rPr>
+                        <a:t>あり</a:t>
+                      </a:r>
+                      <a:endParaRPr lang="en-US" sz="1200" dirty="0">
+                        <a:latin typeface="Yu Gothic" charset="0"/>
+                        <a:ea typeface="Yu Gothic" charset="0"/>
+                        <a:cs typeface="Yu Gothic" charset="0"/>
+                      </a:endParaRPr>
+                    </a:p>
+                  </a:txBody>
+                  <a:tcPr marL="76200" marR="76200" marT="76200" marB="76200" anchor="ctr">
+                    <a:lnL w="6350" cap="flat" cmpd="sng" algn="ctr">
+                      <a:solidFill>
+                        <a:srgbClr val="DDD5D2"/>
+                      </a:solidFill>
+                      <a:prstDash val="solid"/>
+                      <a:round/>
+                      <a:headEnd type="none" w="med" len="med"/>
+                      <a:tailEnd type="none" w="med" len="med"/>
+                    </a:lnL>
+                    <a:lnR w="6350" cap="flat" cmpd="sng" algn="ctr">
+                      <a:solidFill>
+                        <a:srgbClr val="DDD5D2"/>
+                      </a:solidFill>
+                      <a:prstDash val="solid"/>
+                      <a:round/>
+                      <a:headEnd type="none" w="med" len="med"/>
+                      <a:tailEnd type="none" w="med" len="med"/>
+                    </a:lnR>
+                    <a:lnT w="6350" cap="flat" cmpd="sng" algn="ctr">
+                      <a:solidFill>
+                        <a:srgbClr val="DDD5D2"/>
+                      </a:solidFill>
+                      <a:prstDash val="solid"/>
+                      <a:round/>
+                      <a:headEnd type="none" w="med" len="med"/>
+                      <a:tailEnd type="none" w="med" len="med"/>
+                    </a:lnT>
+                    <a:lnB w="6350" cap="flat" cmpd="sng" algn="ctr">
+                      <a:solidFill>
+                        <a:srgbClr val="DDD5D2"/>
+                      </a:solidFill>
+                      <a:prstDash val="solid"/>
+                      <a:round/>
+                      <a:headEnd type="none" w="med" len="med"/>
+                      <a:tailEnd type="none" w="med" len="med"/>
+                    </a:lnB>
+                  </a:tcPr>
+                </a:tc>
+                <a:tc>
+                  <a:txBody>
+                    <a:bodyPr/>
+                    <a:lstStyle/>
+                    <a:p>
+                      <a:pPr indent="0" marL="0">
+                        <a:buNone/>
+                      </a:pPr>
+                      <a:r>
+                        <a:rPr lang="en-US" sz="1200" dirty="0">
+                          <a:solidFill>
+                            <a:srgbClr val="2B2B2B"/>
+                          </a:solidFill>
+                          <a:latin typeface="Yu Gothic" pitchFamily="34" charset="0"/>
+                          <a:ea typeface="Yu Gothic" pitchFamily="34" charset="-122"/>
+                          <a:cs typeface="Yu Gothic" pitchFamily="34" charset="-120"/>
+                        </a:rPr>
+                        <a:t>あり</a:t>
                       </a:r>
                       <a:endParaRPr lang="en-US" sz="1200" dirty="0">
                         <a:latin typeface="Yu Gothic" charset="0"/>
@@ -9632,13 +9850,10 @@
           <a:lstStyle/>
           <a:p>
             <a:pPr indent="0" marL="0">
-              <a:lnSpc>
-                <a:spcPts val="2000"/>
-              </a:lnSpc>
-              <a:buNone/>
-            </a:pPr>
-            <a:r>
-              <a:rPr lang="en-US" sz="1300" b="1" dirty="0">
+              <a:buNone/>
+            </a:pPr>
+            <a:r>
+              <a:rPr lang="en-US" sz="1400" b="1" dirty="0">
                 <a:solidFill>
                   <a:srgbClr val="6D2E46"/>
                 </a:solidFill>
@@ -9646,9 +9861,9 @@
                 <a:ea typeface="Yu Gothic" pitchFamily="34" charset="-122"/>
                 <a:cs typeface="Yu Gothic" pitchFamily="34" charset="-120"/>
               </a:rPr>
-              <a:t>質問会もランチ会も、どちらのコースの方も一緒です。対面はハイブリッドなので、遠方の方はオンラインで参加できます。</a:t>
-            </a:r>
-            <a:endParaRPr lang="en-US" sz="1300" dirty="0"/>
+              <a:t>どちらが上ということではありません。関わり方が違います。</a:t>
+            </a:r>
+            <a:endParaRPr lang="en-US" sz="1400" dirty="0"/>
           </a:p>
         </p:txBody>
       </p:sp>
@@ -9717,7 +9932,7 @@
                 <a:ea typeface="Yu Gothic" pitchFamily="34" charset="-122"/>
                 <a:cs typeface="Yu Gothic" pitchFamily="34" charset="-120"/>
               </a:rPr>
-              <a:t>6ヶ月の進み方（レギュラー）</a:t>
+              <a:t>どちらを選びますか</a:t>
             </a:r>
             <a:endParaRPr lang="en-US" sz="2900" dirty="0"/>
           </a:p>
@@ -9731,12 +9946,194 @@
         </p:nvSpPr>
         <p:spPr>
           <a:xfrm>
-            <a:off x="566928" y="1417320"/>
-            <a:ext cx="1243584" cy="2148840"/>
+            <a:off x="566928" y="1325880"/>
+            <a:ext cx="3913632" cy="2651760"/>
           </a:xfrm>
           <a:prstGeom prst="roundRect">
             <a:avLst>
-              <a:gd name="adj" fmla="val 5882"/>
+              <a:gd name="adj" fmla="val 2759"/>
+            </a:avLst>
+          </a:prstGeom>
+          <a:solidFill>
+            <a:srgbClr val="F7F3F1"/>
+          </a:solidFill>
+          <a:ln/>
+        </p:spPr>
+      </p:sp>
+      <p:sp>
+        <p:nvSpPr>
+          <p:cNvPr id="4" name="Text 2"/>
+          <p:cNvSpPr txBox="1"/>
+          <p:nvPr/>
+        </p:nvSpPr>
+        <p:spPr>
+          <a:xfrm>
+            <a:off x="841248" y="1572768"/>
+            <a:ext cx="3383280" cy="365760"/>
+          </a:xfrm>
+          <a:prstGeom prst="rect">
+            <a:avLst/>
+          </a:prstGeom>
+          <a:noFill/>
+          <a:ln/>
+        </p:spPr>
+        <p:txBody>
+          <a:bodyPr wrap="square" lIns="0" tIns="0" rIns="0" bIns="0" rtlCol="0" anchor="ctr"/>
+          <a:lstStyle/>
+          <a:p>
+            <a:pPr indent="0" marL="0">
+              <a:buNone/>
+            </a:pPr>
+            <a:r>
+              <a:rPr lang="en-US" sz="1600" b="1" dirty="0">
+                <a:solidFill>
+                  <a:srgbClr val="6D2E46"/>
+                </a:solidFill>
+                <a:latin typeface="Yu Gothic" pitchFamily="34" charset="0"/>
+                <a:ea typeface="Yu Gothic" pitchFamily="34" charset="-122"/>
+                <a:cs typeface="Yu Gothic" pitchFamily="34" charset="-120"/>
+              </a:rPr>
+              <a:t>まず、ご自分で進めたい方</a:t>
+            </a:r>
+            <a:endParaRPr lang="en-US" sz="1600" dirty="0"/>
+          </a:p>
+        </p:txBody>
+      </p:sp>
+      <p:sp>
+        <p:nvSpPr>
+          <p:cNvPr id="5" name="Text 3"/>
+          <p:cNvSpPr txBox="1"/>
+          <p:nvPr/>
+        </p:nvSpPr>
+        <p:spPr>
+          <a:xfrm>
+            <a:off x="841248" y="2011680"/>
+            <a:ext cx="3383280" cy="365760"/>
+          </a:xfrm>
+          <a:prstGeom prst="rect">
+            <a:avLst/>
+          </a:prstGeom>
+          <a:noFill/>
+          <a:ln/>
+        </p:spPr>
+        <p:txBody>
+          <a:bodyPr wrap="square" lIns="0" tIns="0" rIns="0" bIns="0" rtlCol="0" anchor="ctr"/>
+          <a:lstStyle/>
+          <a:p>
+            <a:pPr indent="0" marL="0">
+              <a:buNone/>
+            </a:pPr>
+            <a:r>
+              <a:rPr lang="en-US" sz="1400" dirty="0">
+                <a:solidFill>
+                  <a:srgbClr val="7A6A6E"/>
+                </a:solidFill>
+                <a:latin typeface="Yu Gothic" pitchFamily="34" charset="0"/>
+                <a:ea typeface="Yu Gothic" pitchFamily="34" charset="-122"/>
+                <a:cs typeface="Yu Gothic" pitchFamily="34" charset="-120"/>
+              </a:rPr>
+              <a:t>AIマーケティング集中講座</a:t>
+            </a:r>
+            <a:endParaRPr lang="en-US" sz="1400" dirty="0"/>
+          </a:p>
+        </p:txBody>
+      </p:sp>
+      <p:sp>
+        <p:nvSpPr>
+          <p:cNvPr id="6" name="Text 4"/>
+          <p:cNvSpPr txBox="1"/>
+          <p:nvPr/>
+        </p:nvSpPr>
+        <p:spPr>
+          <a:xfrm>
+            <a:off x="841248" y="2468880"/>
+            <a:ext cx="3383280" cy="1280160"/>
+          </a:xfrm>
+          <a:prstGeom prst="rect">
+            <a:avLst/>
+          </a:prstGeom>
+          <a:noFill/>
+          <a:ln/>
+        </p:spPr>
+        <p:txBody>
+          <a:bodyPr wrap="square" lIns="0" tIns="0" rIns="0" bIns="0" rtlCol="0" anchor="ctr"/>
+          <a:lstStyle/>
+          <a:p>
+            <a:pPr indent="0" marL="0">
+              <a:lnSpc>
+                <a:spcPts val="2600"/>
+              </a:lnSpc>
+              <a:buNone/>
+            </a:pPr>
+            <a:r>
+              <a:rPr lang="en-US" sz="1400" dirty="0">
+                <a:solidFill>
+                  <a:srgbClr val="2B2B2B"/>
+                </a:solidFill>
+                <a:latin typeface="Yu Gothic" pitchFamily="34" charset="0"/>
+                <a:ea typeface="Yu Gothic" pitchFamily="34" charset="-122"/>
+                <a:cs typeface="Yu Gothic" pitchFamily="34" charset="-120"/>
+              </a:rPr>
+              <a:t>オンラインだけで完結します。</a:t>
+            </a:r>
+            <a:endParaRPr lang="en-US" sz="1400" dirty="0"/>
+          </a:p>
+          <a:p>
+            <a:pPr indent="0" marL="0">
+              <a:lnSpc>
+                <a:spcPts val="2600"/>
+              </a:lnSpc>
+              <a:buNone/>
+            </a:pPr>
+            <a:r>
+              <a:rPr lang="en-US" sz="1400" dirty="0">
+                <a:solidFill>
+                  <a:srgbClr val="2B2B2B"/>
+                </a:solidFill>
+                <a:latin typeface="Yu Gothic" pitchFamily="34" charset="0"/>
+                <a:ea typeface="Yu Gothic" pitchFamily="34" charset="-122"/>
+                <a:cs typeface="Yu Gothic" pitchFamily="34" charset="-120"/>
+              </a:rPr>
+              <a:t>3ヶ月、6回。</a:t>
+            </a:r>
+            <a:endParaRPr lang="en-US" sz="1400" dirty="0"/>
+          </a:p>
+          <a:p>
+            <a:pPr indent="0" marL="0">
+              <a:lnSpc>
+                <a:spcPts val="2600"/>
+              </a:lnSpc>
+              <a:buNone/>
+            </a:pPr>
+            <a:r>
+              <a:rPr lang="en-US" sz="1400" dirty="0">
+                <a:solidFill>
+                  <a:srgbClr val="2B2B2B"/>
+                </a:solidFill>
+                <a:latin typeface="Yu Gothic" pitchFamily="34" charset="0"/>
+                <a:ea typeface="Yu Gothic" pitchFamily="34" charset="-122"/>
+                <a:cs typeface="Yu Gothic" pitchFamily="34" charset="-120"/>
+              </a:rPr>
+              <a:t>質問はいつでもしてください。</a:t>
+            </a:r>
+            <a:endParaRPr lang="en-US" sz="1400" dirty="0"/>
+          </a:p>
+        </p:txBody>
+      </p:sp>
+      <p:sp>
+        <p:nvSpPr>
+          <p:cNvPr id="7" name="Shape 5"/>
+          <p:cNvSpPr/>
+          <p:nvPr/>
+        </p:nvSpPr>
+        <p:spPr>
+          <a:xfrm>
+            <a:off x="4663440" y="1325880"/>
+            <a:ext cx="3913632" cy="2651760"/>
+          </a:xfrm>
+          <a:prstGeom prst="roundRect">
+            <a:avLst>
+              <a:gd name="adj" fmla="val 2759"/>
             </a:avLst>
           </a:prstGeom>
           <a:solidFill>
@@ -9747,30 +10144,69 @@
       </p:sp>
       <p:sp>
         <p:nvSpPr>
-          <p:cNvPr id="4" name="Text 2"/>
-          <p:cNvSpPr txBox="1"/>
-          <p:nvPr/>
-        </p:nvSpPr>
-        <p:spPr>
-          <a:xfrm>
-            <a:off x="566928" y="1554480"/>
-            <a:ext cx="1243584" cy="274320"/>
-          </a:xfrm>
-          <a:prstGeom prst="rect">
-            <a:avLst/>
-          </a:prstGeom>
-          <a:noFill/>
-          <a:ln/>
-        </p:spPr>
-        <p:txBody>
-          <a:bodyPr wrap="square" lIns="0" tIns="0" rIns="0" bIns="0" rtlCol="0" anchor="ctr"/>
-          <a:lstStyle/>
-          <a:p>
-            <a:pPr algn="ctr" indent="0" marL="0">
-              <a:buNone/>
-            </a:pPr>
-            <a:r>
-              <a:rPr lang="en-US" sz="1200" b="1" dirty="0">
+          <p:cNvPr id="8" name="Text 6"/>
+          <p:cNvSpPr txBox="1"/>
+          <p:nvPr/>
+        </p:nvSpPr>
+        <p:spPr>
+          <a:xfrm>
+            <a:off x="4937760" y="1572768"/>
+            <a:ext cx="3383280" cy="365760"/>
+          </a:xfrm>
+          <a:prstGeom prst="rect">
+            <a:avLst/>
+          </a:prstGeom>
+          <a:noFill/>
+          <a:ln/>
+        </p:spPr>
+        <p:txBody>
+          <a:bodyPr wrap="square" lIns="0" tIns="0" rIns="0" bIns="0" rtlCol="0" anchor="ctr"/>
+          <a:lstStyle/>
+          <a:p>
+            <a:pPr indent="0" marL="0">
+              <a:buNone/>
+            </a:pPr>
+            <a:r>
+              <a:rPr lang="en-US" sz="1600" b="1" dirty="0">
+                <a:solidFill>
+                  <a:srgbClr val="6D2E46"/>
+                </a:solidFill>
+                <a:latin typeface="Yu Gothic" pitchFamily="34" charset="0"/>
+                <a:ea typeface="Yu Gothic" pitchFamily="34" charset="-122"/>
+                <a:cs typeface="Yu Gothic" pitchFamily="34" charset="-120"/>
+              </a:rPr>
+              <a:t>お会いして、一緒にやりたい方</a:t>
+            </a:r>
+            <a:endParaRPr lang="en-US" sz="1600" dirty="0"/>
+          </a:p>
+        </p:txBody>
+      </p:sp>
+      <p:sp>
+        <p:nvSpPr>
+          <p:cNvPr id="9" name="Text 7"/>
+          <p:cNvSpPr txBox="1"/>
+          <p:nvPr/>
+        </p:nvSpPr>
+        <p:spPr>
+          <a:xfrm>
+            <a:off x="4937760" y="2011680"/>
+            <a:ext cx="3383280" cy="365760"/>
+          </a:xfrm>
+          <a:prstGeom prst="rect">
+            <a:avLst/>
+          </a:prstGeom>
+          <a:noFill/>
+          <a:ln/>
+        </p:spPr>
+        <p:txBody>
+          <a:bodyPr wrap="square" lIns="0" tIns="0" rIns="0" bIns="0" rtlCol="0" anchor="ctr"/>
+          <a:lstStyle/>
+          <a:p>
+            <a:pPr indent="0" marL="0">
+              <a:buNone/>
+            </a:pPr>
+            <a:r>
+              <a:rPr lang="en-US" sz="1400" dirty="0">
                 <a:solidFill>
                   <a:srgbClr val="7A6A6E"/>
                 </a:solidFill>
@@ -9778,140 +10214,81 @@
                 <a:ea typeface="Yu Gothic" pitchFamily="34" charset="-122"/>
                 <a:cs typeface="Yu Gothic" pitchFamily="34" charset="-120"/>
               </a:rPr>
-              <a:t>1ヶ月目</a:t>
-            </a:r>
-            <a:endParaRPr lang="en-US" sz="1200" dirty="0"/>
-          </a:p>
-        </p:txBody>
-      </p:sp>
-      <p:sp>
-        <p:nvSpPr>
-          <p:cNvPr id="5" name="Text 3"/>
-          <p:cNvSpPr txBox="1"/>
-          <p:nvPr/>
-        </p:nvSpPr>
-        <p:spPr>
-          <a:xfrm>
-            <a:off x="612648" y="1920240"/>
-            <a:ext cx="1152144" cy="1005840"/>
-          </a:xfrm>
-          <a:prstGeom prst="rect">
-            <a:avLst/>
-          </a:prstGeom>
-          <a:noFill/>
-          <a:ln/>
-        </p:spPr>
-        <p:txBody>
-          <a:bodyPr wrap="square" lIns="0" tIns="0" rIns="0" bIns="0" rtlCol="0" anchor="ctr"/>
-          <a:lstStyle/>
-          <a:p>
-            <a:pPr algn="ctr" indent="0" marL="0">
+              <a:t>ファッション起業AIマスター講座</a:t>
+            </a:r>
+            <a:endParaRPr lang="en-US" sz="1400" dirty="0"/>
+          </a:p>
+        </p:txBody>
+      </p:sp>
+      <p:sp>
+        <p:nvSpPr>
+          <p:cNvPr id="10" name="Text 8"/>
+          <p:cNvSpPr txBox="1"/>
+          <p:nvPr/>
+        </p:nvSpPr>
+        <p:spPr>
+          <a:xfrm>
+            <a:off x="4937760" y="2468880"/>
+            <a:ext cx="3383280" cy="1280160"/>
+          </a:xfrm>
+          <a:prstGeom prst="rect">
+            <a:avLst/>
+          </a:prstGeom>
+          <a:noFill/>
+          <a:ln/>
+        </p:spPr>
+        <p:txBody>
+          <a:bodyPr wrap="square" lIns="0" tIns="0" rIns="0" bIns="0" rtlCol="0" anchor="ctr"/>
+          <a:lstStyle/>
+          <a:p>
+            <a:pPr indent="0" marL="0">
               <a:lnSpc>
-                <a:spcPts val="1600"/>
+                <a:spcPts val="2600"/>
               </a:lnSpc>
               <a:buNone/>
             </a:pPr>
             <a:r>
-              <a:rPr lang="en-US" sz="1100" b="1" dirty="0">
-                <a:solidFill>
-                  <a:srgbClr val="6D2E46"/>
-                </a:solidFill>
-                <a:latin typeface="Yu Gothic" pitchFamily="34" charset="0"/>
-                <a:ea typeface="Yu Gothic" pitchFamily="34" charset="-122"/>
-                <a:cs typeface="Yu Gothic" pitchFamily="34" charset="-120"/>
-              </a:rPr>
-              <a:t>講座</a:t>
-            </a:r>
-            <a:endParaRPr lang="en-US" sz="1100" dirty="0"/>
-          </a:p>
-          <a:p>
-            <a:pPr algn="ctr" indent="0" marL="0">
+              <a:rPr lang="en-US" sz="1400" dirty="0">
+                <a:solidFill>
+                  <a:srgbClr val="2B2B2B"/>
+                </a:solidFill>
+                <a:latin typeface="Yu Gothic" pitchFamily="34" charset="0"/>
+                <a:ea typeface="Yu Gothic" pitchFamily="34" charset="-122"/>
+                <a:cs typeface="Yu Gothic" pitchFamily="34" charset="-120"/>
+              </a:rPr>
+              <a:t>東京で3回、お会いします。</a:t>
+            </a:r>
+            <a:endParaRPr lang="en-US" sz="1400" dirty="0"/>
+          </a:p>
+          <a:p>
+            <a:pPr indent="0" marL="0">
               <a:lnSpc>
-                <a:spcPts val="1600"/>
+                <a:spcPts val="2600"/>
               </a:lnSpc>
               <a:buNone/>
             </a:pPr>
             <a:r>
-              <a:rPr lang="en-US" sz="1100" b="1" dirty="0">
-                <a:solidFill>
-                  <a:srgbClr val="6D2E46"/>
-                </a:solidFill>
-                <a:latin typeface="Yu Gothic" pitchFamily="34" charset="0"/>
-                <a:ea typeface="Yu Gothic" pitchFamily="34" charset="-122"/>
-                <a:cs typeface="Yu Gothic" pitchFamily="34" charset="-120"/>
-              </a:rPr>
-              <a:t>ハイブリッド</a:t>
-            </a:r>
-            <a:endParaRPr lang="en-US" sz="1100" dirty="0"/>
-          </a:p>
-          <a:p>
-            <a:pPr algn="ctr" indent="0" marL="0">
+              <a:rPr lang="en-US" sz="1400" dirty="0">
+                <a:solidFill>
+                  <a:srgbClr val="2B2B2B"/>
+                </a:solidFill>
+                <a:latin typeface="Yu Gothic" pitchFamily="34" charset="0"/>
+                <a:ea typeface="Yu Gothic" pitchFamily="34" charset="-122"/>
+                <a:cs typeface="Yu Gothic" pitchFamily="34" charset="-120"/>
+              </a:rPr>
+              <a:t>6ヶ月、オンライン8回。</a:t>
+            </a:r>
+            <a:endParaRPr lang="en-US" sz="1400" dirty="0"/>
+          </a:p>
+          <a:p>
+            <a:pPr indent="0" marL="0">
               <a:lnSpc>
-                <a:spcPts val="1600"/>
+                <a:spcPts val="2600"/>
               </a:lnSpc>
               <a:buNone/>
             </a:pPr>
             <a:r>
-              <a:rPr lang="en-US" sz="1100" b="1" dirty="0">
-                <a:solidFill>
-                  <a:srgbClr val="6D2E46"/>
-                </a:solidFill>
-                <a:latin typeface="Yu Gothic" pitchFamily="34" charset="0"/>
-                <a:ea typeface="Yu Gothic" pitchFamily="34" charset="-122"/>
-                <a:cs typeface="Yu Gothic" pitchFamily="34" charset="-120"/>
-              </a:rPr>
-              <a:t>（東京＋</a:t>
-            </a:r>
-            <a:endParaRPr lang="en-US" sz="1100" dirty="0"/>
-          </a:p>
-          <a:p>
-            <a:pPr algn="ctr" indent="0" marL="0">
-              <a:lnSpc>
-                <a:spcPts val="1600"/>
-              </a:lnSpc>
-              <a:buNone/>
-            </a:pPr>
-            <a:r>
-              <a:rPr lang="en-US" sz="1100" b="1" dirty="0">
-                <a:solidFill>
-                  <a:srgbClr val="6D2E46"/>
-                </a:solidFill>
-                <a:latin typeface="Yu Gothic" pitchFamily="34" charset="0"/>
-                <a:ea typeface="Yu Gothic" pitchFamily="34" charset="-122"/>
-                <a:cs typeface="Yu Gothic" pitchFamily="34" charset="-120"/>
-              </a:rPr>
-              <a:t>オンライン）</a:t>
-            </a:r>
-            <a:endParaRPr lang="en-US" sz="1100" dirty="0"/>
-          </a:p>
-        </p:txBody>
-      </p:sp>
-      <p:sp>
-        <p:nvSpPr>
-          <p:cNvPr id="6" name="Text 4"/>
-          <p:cNvSpPr txBox="1"/>
-          <p:nvPr/>
-        </p:nvSpPr>
-        <p:spPr>
-          <a:xfrm>
-            <a:off x="566928" y="3063240"/>
-            <a:ext cx="1243584" cy="274320"/>
-          </a:xfrm>
-          <a:prstGeom prst="rect">
-            <a:avLst/>
-          </a:prstGeom>
-          <a:noFill/>
-          <a:ln/>
-        </p:spPr>
-        <p:txBody>
-          <a:bodyPr wrap="square" lIns="0" tIns="0" rIns="0" bIns="0" rtlCol="0" anchor="ctr"/>
-          <a:lstStyle/>
-          <a:p>
-            <a:pPr algn="ctr" indent="0" marL="0">
-              <a:buNone/>
-            </a:pPr>
-            <a:r>
-              <a:rPr lang="en-US" sz="1100" dirty="0">
+              <a:rPr lang="en-US" sz="1400" dirty="0">
                 <a:solidFill>
                   <a:srgbClr val="2B2B2B"/>
                 </a:solidFill>
@@ -9919,26 +10296,26 @@
                 <a:ea typeface="Yu Gothic" pitchFamily="34" charset="-122"/>
                 <a:cs typeface="Yu Gothic" pitchFamily="34" charset="-120"/>
               </a:rPr>
-              <a:t>質問会</a:t>
-            </a:r>
-            <a:endParaRPr lang="en-US" sz="1100" dirty="0"/>
-          </a:p>
-        </p:txBody>
-      </p:sp>
-      <p:sp>
-        <p:nvSpPr>
-          <p:cNvPr id="7" name="Shape 5"/>
+              <a:t>事前と事後に、個別に見ます。</a:t>
+            </a:r>
+            <a:endParaRPr lang="en-US" sz="1400" dirty="0"/>
+          </a:p>
+        </p:txBody>
+      </p:sp>
+      <p:sp>
+        <p:nvSpPr>
+          <p:cNvPr id="11" name="Shape 9"/>
           <p:cNvSpPr/>
           <p:nvPr/>
         </p:nvSpPr>
         <p:spPr>
           <a:xfrm>
-            <a:off x="1924812" y="1417320"/>
-            <a:ext cx="1243584" cy="2148840"/>
+            <a:off x="566928" y="4114800"/>
+            <a:ext cx="8010144" cy="640080"/>
           </a:xfrm>
           <a:prstGeom prst="roundRect">
             <a:avLst>
-              <a:gd name="adj" fmla="val 5882"/>
+              <a:gd name="adj" fmla="val 11429"/>
             </a:avLst>
           </a:prstGeom>
           <a:solidFill>
@@ -9949,72 +10326,30 @@
       </p:sp>
       <p:sp>
         <p:nvSpPr>
-          <p:cNvPr id="8" name="Text 6"/>
-          <p:cNvSpPr txBox="1"/>
-          <p:nvPr/>
-        </p:nvSpPr>
-        <p:spPr>
-          <a:xfrm>
-            <a:off x="1924812" y="1554480"/>
-            <a:ext cx="1243584" cy="274320"/>
-          </a:xfrm>
-          <a:prstGeom prst="rect">
-            <a:avLst/>
-          </a:prstGeom>
-          <a:noFill/>
-          <a:ln/>
-        </p:spPr>
-        <p:txBody>
-          <a:bodyPr wrap="square" lIns="0" tIns="0" rIns="0" bIns="0" rtlCol="0" anchor="ctr"/>
-          <a:lstStyle/>
-          <a:p>
-            <a:pPr algn="ctr" indent="0" marL="0">
-              <a:buNone/>
-            </a:pPr>
-            <a:r>
-              <a:rPr lang="en-US" sz="1200" b="1" dirty="0">
-                <a:solidFill>
-                  <a:srgbClr val="7A6A6E"/>
-                </a:solidFill>
-                <a:latin typeface="Yu Gothic" pitchFamily="34" charset="0"/>
-                <a:ea typeface="Yu Gothic" pitchFamily="34" charset="-122"/>
-                <a:cs typeface="Yu Gothic" pitchFamily="34" charset="-120"/>
-              </a:rPr>
-              <a:t>2ヶ月目</a:t>
-            </a:r>
-            <a:endParaRPr lang="en-US" sz="1200" dirty="0"/>
-          </a:p>
-        </p:txBody>
-      </p:sp>
-      <p:sp>
-        <p:nvSpPr>
-          <p:cNvPr id="9" name="Text 7"/>
-          <p:cNvSpPr txBox="1"/>
-          <p:nvPr/>
-        </p:nvSpPr>
-        <p:spPr>
-          <a:xfrm>
-            <a:off x="1970532" y="1920240"/>
-            <a:ext cx="1152144" cy="1005840"/>
-          </a:xfrm>
-          <a:prstGeom prst="rect">
-            <a:avLst/>
-          </a:prstGeom>
-          <a:noFill/>
-          <a:ln/>
-        </p:spPr>
-        <p:txBody>
-          <a:bodyPr wrap="square" lIns="0" tIns="0" rIns="0" bIns="0" rtlCol="0" anchor="ctr"/>
-          <a:lstStyle/>
-          <a:p>
-            <a:pPr algn="ctr" indent="0" marL="0">
-              <a:lnSpc>
-                <a:spcPts val="1600"/>
-              </a:lnSpc>
-              <a:buNone/>
-            </a:pPr>
-            <a:r>
-              <a:rPr lang="en-US" sz="1100" b="1" dirty="0">
+          <p:cNvPr id="12" name="Text 10"/>
+          <p:cNvSpPr txBox="1"/>
+          <p:nvPr/>
+        </p:nvSpPr>
+        <p:spPr>
+          <a:xfrm>
+            <a:off x="841248" y="4114800"/>
+            <a:ext cx="7461504" cy="640080"/>
+          </a:xfrm>
+          <a:prstGeom prst="rect">
+            <a:avLst/>
+          </a:prstGeom>
+          <a:noFill/>
+          <a:ln/>
+        </p:spPr>
+        <p:txBody>
+          <a:bodyPr wrap="square" lIns="0" tIns="0" rIns="0" bIns="0" rtlCol="0" anchor="ctr"/>
+          <a:lstStyle/>
+          <a:p>
+            <a:pPr indent="0" marL="0">
+              <a:buNone/>
+            </a:pPr>
+            <a:r>
+              <a:rPr lang="en-US" sz="1400" b="1" dirty="0">
                 <a:solidFill>
                   <a:srgbClr val="6D2E46"/>
                 </a:solidFill>
@@ -10022,854 +10357,7 @@
                 <a:ea typeface="Yu Gothic" pitchFamily="34" charset="-122"/>
                 <a:cs typeface="Yu Gothic" pitchFamily="34" charset="-120"/>
               </a:rPr>
-              <a:t>講座</a:t>
-            </a:r>
-            <a:endParaRPr lang="en-US" sz="1100" dirty="0"/>
-          </a:p>
-          <a:p>
-            <a:pPr algn="ctr" indent="0" marL="0">
-              <a:lnSpc>
-                <a:spcPts val="1600"/>
-              </a:lnSpc>
-              <a:buNone/>
-            </a:pPr>
-            <a:r>
-              <a:rPr lang="en-US" sz="1100" b="1" dirty="0">
-                <a:solidFill>
-                  <a:srgbClr val="6D2E46"/>
-                </a:solidFill>
-                <a:latin typeface="Yu Gothic" pitchFamily="34" charset="0"/>
-                <a:ea typeface="Yu Gothic" pitchFamily="34" charset="-122"/>
-                <a:cs typeface="Yu Gothic" pitchFamily="34" charset="-120"/>
-              </a:rPr>
-              <a:t>オンライン</a:t>
-            </a:r>
-            <a:endParaRPr lang="en-US" sz="1100" dirty="0"/>
-          </a:p>
-        </p:txBody>
-      </p:sp>
-      <p:sp>
-        <p:nvSpPr>
-          <p:cNvPr id="10" name="Text 8"/>
-          <p:cNvSpPr txBox="1"/>
-          <p:nvPr/>
-        </p:nvSpPr>
-        <p:spPr>
-          <a:xfrm>
-            <a:off x="1924812" y="3063240"/>
-            <a:ext cx="1243584" cy="274320"/>
-          </a:xfrm>
-          <a:prstGeom prst="rect">
-            <a:avLst/>
-          </a:prstGeom>
-          <a:noFill/>
-          <a:ln/>
-        </p:spPr>
-        <p:txBody>
-          <a:bodyPr wrap="square" lIns="0" tIns="0" rIns="0" bIns="0" rtlCol="0" anchor="ctr"/>
-          <a:lstStyle/>
-          <a:p>
-            <a:pPr algn="ctr" indent="0" marL="0">
-              <a:buNone/>
-            </a:pPr>
-            <a:r>
-              <a:rPr lang="en-US" sz="1100" dirty="0">
-                <a:solidFill>
-                  <a:srgbClr val="2B2B2B"/>
-                </a:solidFill>
-                <a:latin typeface="Yu Gothic" pitchFamily="34" charset="0"/>
-                <a:ea typeface="Yu Gothic" pitchFamily="34" charset="-122"/>
-                <a:cs typeface="Yu Gothic" pitchFamily="34" charset="-120"/>
-              </a:rPr>
-              <a:t>質問会</a:t>
-            </a:r>
-            <a:endParaRPr lang="en-US" sz="1100" dirty="0"/>
-          </a:p>
-        </p:txBody>
-      </p:sp>
-      <p:sp>
-        <p:nvSpPr>
-          <p:cNvPr id="11" name="Shape 9"/>
-          <p:cNvSpPr/>
-          <p:nvPr/>
-        </p:nvSpPr>
-        <p:spPr>
-          <a:xfrm>
-            <a:off x="3282696" y="1417320"/>
-            <a:ext cx="1243584" cy="2148840"/>
-          </a:xfrm>
-          <a:prstGeom prst="roundRect">
-            <a:avLst>
-              <a:gd name="adj" fmla="val 5882"/>
-            </a:avLst>
-          </a:prstGeom>
-          <a:solidFill>
-            <a:srgbClr val="F7F3F1"/>
-          </a:solidFill>
-          <a:ln/>
-        </p:spPr>
-      </p:sp>
-      <p:sp>
-        <p:nvSpPr>
-          <p:cNvPr id="12" name="Text 10"/>
-          <p:cNvSpPr txBox="1"/>
-          <p:nvPr/>
-        </p:nvSpPr>
-        <p:spPr>
-          <a:xfrm>
-            <a:off x="3282696" y="1554480"/>
-            <a:ext cx="1243584" cy="274320"/>
-          </a:xfrm>
-          <a:prstGeom prst="rect">
-            <a:avLst/>
-          </a:prstGeom>
-          <a:noFill/>
-          <a:ln/>
-        </p:spPr>
-        <p:txBody>
-          <a:bodyPr wrap="square" lIns="0" tIns="0" rIns="0" bIns="0" rtlCol="0" anchor="ctr"/>
-          <a:lstStyle/>
-          <a:p>
-            <a:pPr algn="ctr" indent="0" marL="0">
-              <a:buNone/>
-            </a:pPr>
-            <a:r>
-              <a:rPr lang="en-US" sz="1200" b="1" dirty="0">
-                <a:solidFill>
-                  <a:srgbClr val="7A6A6E"/>
-                </a:solidFill>
-                <a:latin typeface="Yu Gothic" pitchFamily="34" charset="0"/>
-                <a:ea typeface="Yu Gothic" pitchFamily="34" charset="-122"/>
-                <a:cs typeface="Yu Gothic" pitchFamily="34" charset="-120"/>
-              </a:rPr>
-              <a:t>3ヶ月目</a:t>
-            </a:r>
-            <a:endParaRPr lang="en-US" sz="1200" dirty="0"/>
-          </a:p>
-        </p:txBody>
-      </p:sp>
-      <p:sp>
-        <p:nvSpPr>
-          <p:cNvPr id="13" name="Text 11"/>
-          <p:cNvSpPr txBox="1"/>
-          <p:nvPr/>
-        </p:nvSpPr>
-        <p:spPr>
-          <a:xfrm>
-            <a:off x="3328416" y="1920240"/>
-            <a:ext cx="1152144" cy="1005840"/>
-          </a:xfrm>
-          <a:prstGeom prst="rect">
-            <a:avLst/>
-          </a:prstGeom>
-          <a:noFill/>
-          <a:ln/>
-        </p:spPr>
-        <p:txBody>
-          <a:bodyPr wrap="square" lIns="0" tIns="0" rIns="0" bIns="0" rtlCol="0" anchor="ctr"/>
-          <a:lstStyle/>
-          <a:p>
-            <a:pPr algn="ctr" indent="0" marL="0">
-              <a:lnSpc>
-                <a:spcPts val="1600"/>
-              </a:lnSpc>
-              <a:buNone/>
-            </a:pPr>
-            <a:r>
-              <a:rPr lang="en-US" sz="1100" b="1" dirty="0">
-                <a:solidFill>
-                  <a:srgbClr val="6D2E46"/>
-                </a:solidFill>
-                <a:latin typeface="Yu Gothic" pitchFamily="34" charset="0"/>
-                <a:ea typeface="Yu Gothic" pitchFamily="34" charset="-122"/>
-                <a:cs typeface="Yu Gothic" pitchFamily="34" charset="-120"/>
-              </a:rPr>
-              <a:t>講座</a:t>
-            </a:r>
-            <a:endParaRPr lang="en-US" sz="1100" dirty="0"/>
-          </a:p>
-          <a:p>
-            <a:pPr algn="ctr" indent="0" marL="0">
-              <a:lnSpc>
-                <a:spcPts val="1600"/>
-              </a:lnSpc>
-              <a:buNone/>
-            </a:pPr>
-            <a:r>
-              <a:rPr lang="en-US" sz="1100" b="1" dirty="0">
-                <a:solidFill>
-                  <a:srgbClr val="6D2E46"/>
-                </a:solidFill>
-                <a:latin typeface="Yu Gothic" pitchFamily="34" charset="0"/>
-                <a:ea typeface="Yu Gothic" pitchFamily="34" charset="-122"/>
-                <a:cs typeface="Yu Gothic" pitchFamily="34" charset="-120"/>
-              </a:rPr>
-              <a:t>オンライン</a:t>
-            </a:r>
-            <a:endParaRPr lang="en-US" sz="1100" dirty="0"/>
-          </a:p>
-        </p:txBody>
-      </p:sp>
-      <p:sp>
-        <p:nvSpPr>
-          <p:cNvPr id="14" name="Text 12"/>
-          <p:cNvSpPr txBox="1"/>
-          <p:nvPr/>
-        </p:nvSpPr>
-        <p:spPr>
-          <a:xfrm>
-            <a:off x="3282696" y="3063240"/>
-            <a:ext cx="1243584" cy="274320"/>
-          </a:xfrm>
-          <a:prstGeom prst="rect">
-            <a:avLst/>
-          </a:prstGeom>
-          <a:noFill/>
-          <a:ln/>
-        </p:spPr>
-        <p:txBody>
-          <a:bodyPr wrap="square" lIns="0" tIns="0" rIns="0" bIns="0" rtlCol="0" anchor="ctr"/>
-          <a:lstStyle/>
-          <a:p>
-            <a:pPr algn="ctr" indent="0" marL="0">
-              <a:buNone/>
-            </a:pPr>
-            <a:r>
-              <a:rPr lang="en-US" sz="1100" dirty="0">
-                <a:solidFill>
-                  <a:srgbClr val="2B2B2B"/>
-                </a:solidFill>
-                <a:latin typeface="Yu Gothic" pitchFamily="34" charset="0"/>
-                <a:ea typeface="Yu Gothic" pitchFamily="34" charset="-122"/>
-                <a:cs typeface="Yu Gothic" pitchFamily="34" charset="-120"/>
-              </a:rPr>
-              <a:t>質問会</a:t>
-            </a:r>
-            <a:endParaRPr lang="en-US" sz="1100" dirty="0"/>
-          </a:p>
-        </p:txBody>
-      </p:sp>
-      <p:sp>
-        <p:nvSpPr>
-          <p:cNvPr id="15" name="Shape 13"/>
-          <p:cNvSpPr/>
-          <p:nvPr/>
-        </p:nvSpPr>
-        <p:spPr>
-          <a:xfrm>
-            <a:off x="4640580" y="1417320"/>
-            <a:ext cx="1243584" cy="2148840"/>
-          </a:xfrm>
-          <a:prstGeom prst="roundRect">
-            <a:avLst>
-              <a:gd name="adj" fmla="val 5882"/>
-            </a:avLst>
-          </a:prstGeom>
-          <a:solidFill>
-            <a:srgbClr val="ECE2D0"/>
-          </a:solidFill>
-          <a:ln/>
-        </p:spPr>
-      </p:sp>
-      <p:sp>
-        <p:nvSpPr>
-          <p:cNvPr id="16" name="Text 14"/>
-          <p:cNvSpPr txBox="1"/>
-          <p:nvPr/>
-        </p:nvSpPr>
-        <p:spPr>
-          <a:xfrm>
-            <a:off x="4640580" y="1554480"/>
-            <a:ext cx="1243584" cy="274320"/>
-          </a:xfrm>
-          <a:prstGeom prst="rect">
-            <a:avLst/>
-          </a:prstGeom>
-          <a:noFill/>
-          <a:ln/>
-        </p:spPr>
-        <p:txBody>
-          <a:bodyPr wrap="square" lIns="0" tIns="0" rIns="0" bIns="0" rtlCol="0" anchor="ctr"/>
-          <a:lstStyle/>
-          <a:p>
-            <a:pPr algn="ctr" indent="0" marL="0">
-              <a:buNone/>
-            </a:pPr>
-            <a:r>
-              <a:rPr lang="en-US" sz="1200" b="1" dirty="0">
-                <a:solidFill>
-                  <a:srgbClr val="7A6A6E"/>
-                </a:solidFill>
-                <a:latin typeface="Yu Gothic" pitchFamily="34" charset="0"/>
-                <a:ea typeface="Yu Gothic" pitchFamily="34" charset="-122"/>
-                <a:cs typeface="Yu Gothic" pitchFamily="34" charset="-120"/>
-              </a:rPr>
-              <a:t>4ヶ月目</a:t>
-            </a:r>
-            <a:endParaRPr lang="en-US" sz="1200" dirty="0"/>
-          </a:p>
-        </p:txBody>
-      </p:sp>
-      <p:sp>
-        <p:nvSpPr>
-          <p:cNvPr id="17" name="Text 15"/>
-          <p:cNvSpPr txBox="1"/>
-          <p:nvPr/>
-        </p:nvSpPr>
-        <p:spPr>
-          <a:xfrm>
-            <a:off x="4686300" y="1920240"/>
-            <a:ext cx="1152144" cy="1005840"/>
-          </a:xfrm>
-          <a:prstGeom prst="rect">
-            <a:avLst/>
-          </a:prstGeom>
-          <a:noFill/>
-          <a:ln/>
-        </p:spPr>
-        <p:txBody>
-          <a:bodyPr wrap="square" lIns="0" tIns="0" rIns="0" bIns="0" rtlCol="0" anchor="ctr"/>
-          <a:lstStyle/>
-          <a:p>
-            <a:pPr algn="ctr" indent="0" marL="0">
-              <a:lnSpc>
-                <a:spcPts val="1600"/>
-              </a:lnSpc>
-              <a:buNone/>
-            </a:pPr>
-            <a:r>
-              <a:rPr lang="en-US" sz="1100" b="1" dirty="0">
-                <a:solidFill>
-                  <a:srgbClr val="6D2E46"/>
-                </a:solidFill>
-                <a:latin typeface="Yu Gothic" pitchFamily="34" charset="0"/>
-                <a:ea typeface="Yu Gothic" pitchFamily="34" charset="-122"/>
-                <a:cs typeface="Yu Gothic" pitchFamily="34" charset="-120"/>
-              </a:rPr>
-              <a:t>講座</a:t>
-            </a:r>
-            <a:endParaRPr lang="en-US" sz="1100" dirty="0"/>
-          </a:p>
-          <a:p>
-            <a:pPr algn="ctr" indent="0" marL="0">
-              <a:lnSpc>
-                <a:spcPts val="1600"/>
-              </a:lnSpc>
-              <a:buNone/>
-            </a:pPr>
-            <a:r>
-              <a:rPr lang="en-US" sz="1100" b="1" dirty="0">
-                <a:solidFill>
-                  <a:srgbClr val="6D2E46"/>
-                </a:solidFill>
-                <a:latin typeface="Yu Gothic" pitchFamily="34" charset="0"/>
-                <a:ea typeface="Yu Gothic" pitchFamily="34" charset="-122"/>
-                <a:cs typeface="Yu Gothic" pitchFamily="34" charset="-120"/>
-              </a:rPr>
-              <a:t>ハイブリッド</a:t>
-            </a:r>
-            <a:endParaRPr lang="en-US" sz="1100" dirty="0"/>
-          </a:p>
-          <a:p>
-            <a:pPr algn="ctr" indent="0" marL="0">
-              <a:lnSpc>
-                <a:spcPts val="1600"/>
-              </a:lnSpc>
-              <a:buNone/>
-            </a:pPr>
-            <a:r>
-              <a:rPr lang="en-US" sz="1100" b="1" dirty="0">
-                <a:solidFill>
-                  <a:srgbClr val="6D2E46"/>
-                </a:solidFill>
-                <a:latin typeface="Yu Gothic" pitchFamily="34" charset="0"/>
-                <a:ea typeface="Yu Gothic" pitchFamily="34" charset="-122"/>
-                <a:cs typeface="Yu Gothic" pitchFamily="34" charset="-120"/>
-              </a:rPr>
-              <a:t>（東京＋</a:t>
-            </a:r>
-            <a:endParaRPr lang="en-US" sz="1100" dirty="0"/>
-          </a:p>
-          <a:p>
-            <a:pPr algn="ctr" indent="0" marL="0">
-              <a:lnSpc>
-                <a:spcPts val="1600"/>
-              </a:lnSpc>
-              <a:buNone/>
-            </a:pPr>
-            <a:r>
-              <a:rPr lang="en-US" sz="1100" b="1" dirty="0">
-                <a:solidFill>
-                  <a:srgbClr val="6D2E46"/>
-                </a:solidFill>
-                <a:latin typeface="Yu Gothic" pitchFamily="34" charset="0"/>
-                <a:ea typeface="Yu Gothic" pitchFamily="34" charset="-122"/>
-                <a:cs typeface="Yu Gothic" pitchFamily="34" charset="-120"/>
-              </a:rPr>
-              <a:t>オンライン）</a:t>
-            </a:r>
-            <a:endParaRPr lang="en-US" sz="1100" dirty="0"/>
-          </a:p>
-        </p:txBody>
-      </p:sp>
-      <p:sp>
-        <p:nvSpPr>
-          <p:cNvPr id="18" name="Text 16"/>
-          <p:cNvSpPr txBox="1"/>
-          <p:nvPr/>
-        </p:nvSpPr>
-        <p:spPr>
-          <a:xfrm>
-            <a:off x="4640580" y="3063240"/>
-            <a:ext cx="1243584" cy="274320"/>
-          </a:xfrm>
-          <a:prstGeom prst="rect">
-            <a:avLst/>
-          </a:prstGeom>
-          <a:noFill/>
-          <a:ln/>
-        </p:spPr>
-        <p:txBody>
-          <a:bodyPr wrap="square" lIns="0" tIns="0" rIns="0" bIns="0" rtlCol="0" anchor="ctr"/>
-          <a:lstStyle/>
-          <a:p>
-            <a:pPr algn="ctr" indent="0" marL="0">
-              <a:buNone/>
-            </a:pPr>
-            <a:r>
-              <a:rPr lang="en-US" sz="1100" dirty="0">
-                <a:solidFill>
-                  <a:srgbClr val="2B2B2B"/>
-                </a:solidFill>
-                <a:latin typeface="Yu Gothic" pitchFamily="34" charset="0"/>
-                <a:ea typeface="Yu Gothic" pitchFamily="34" charset="-122"/>
-                <a:cs typeface="Yu Gothic" pitchFamily="34" charset="-120"/>
-              </a:rPr>
-              <a:t>質問会</a:t>
-            </a:r>
-            <a:endParaRPr lang="en-US" sz="1100" dirty="0"/>
-          </a:p>
-        </p:txBody>
-      </p:sp>
-      <p:sp>
-        <p:nvSpPr>
-          <p:cNvPr id="19" name="Text 17"/>
-          <p:cNvSpPr txBox="1"/>
-          <p:nvPr/>
-        </p:nvSpPr>
-        <p:spPr>
-          <a:xfrm>
-            <a:off x="4640580" y="3310128"/>
-            <a:ext cx="1243584" cy="228600"/>
-          </a:xfrm>
-          <a:prstGeom prst="rect">
-            <a:avLst/>
-          </a:prstGeom>
-          <a:noFill/>
-          <a:ln/>
-        </p:spPr>
-        <p:txBody>
-          <a:bodyPr wrap="square" lIns="0" tIns="0" rIns="0" bIns="0" rtlCol="0" anchor="ctr"/>
-          <a:lstStyle/>
-          <a:p>
-            <a:pPr algn="ctr" indent="0" marL="0">
-              <a:buNone/>
-            </a:pPr>
-            <a:r>
-              <a:rPr lang="en-US" sz="1000" b="1" dirty="0">
-                <a:solidFill>
-                  <a:srgbClr val="A26769"/>
-                </a:solidFill>
-                <a:latin typeface="Yu Gothic" pitchFamily="34" charset="0"/>
-                <a:ea typeface="Yu Gothic" pitchFamily="34" charset="-122"/>
-                <a:cs typeface="Yu Gothic" pitchFamily="34" charset="-120"/>
-              </a:rPr>
-              <a:t>ランチ会</a:t>
-            </a:r>
-            <a:endParaRPr lang="en-US" sz="1000" dirty="0"/>
-          </a:p>
-        </p:txBody>
-      </p:sp>
-      <p:sp>
-        <p:nvSpPr>
-          <p:cNvPr id="20" name="Shape 18"/>
-          <p:cNvSpPr/>
-          <p:nvPr/>
-        </p:nvSpPr>
-        <p:spPr>
-          <a:xfrm>
-            <a:off x="5998464" y="1417320"/>
-            <a:ext cx="1243584" cy="2148840"/>
-          </a:xfrm>
-          <a:prstGeom prst="roundRect">
-            <a:avLst>
-              <a:gd name="adj" fmla="val 5882"/>
-            </a:avLst>
-          </a:prstGeom>
-          <a:solidFill>
-            <a:srgbClr val="F7F3F1"/>
-          </a:solidFill>
-          <a:ln/>
-        </p:spPr>
-      </p:sp>
-      <p:sp>
-        <p:nvSpPr>
-          <p:cNvPr id="21" name="Text 19"/>
-          <p:cNvSpPr txBox="1"/>
-          <p:nvPr/>
-        </p:nvSpPr>
-        <p:spPr>
-          <a:xfrm>
-            <a:off x="5998464" y="1554480"/>
-            <a:ext cx="1243584" cy="274320"/>
-          </a:xfrm>
-          <a:prstGeom prst="rect">
-            <a:avLst/>
-          </a:prstGeom>
-          <a:noFill/>
-          <a:ln/>
-        </p:spPr>
-        <p:txBody>
-          <a:bodyPr wrap="square" lIns="0" tIns="0" rIns="0" bIns="0" rtlCol="0" anchor="ctr"/>
-          <a:lstStyle/>
-          <a:p>
-            <a:pPr algn="ctr" indent="0" marL="0">
-              <a:buNone/>
-            </a:pPr>
-            <a:r>
-              <a:rPr lang="en-US" sz="1200" b="1" dirty="0">
-                <a:solidFill>
-                  <a:srgbClr val="7A6A6E"/>
-                </a:solidFill>
-                <a:latin typeface="Yu Gothic" pitchFamily="34" charset="0"/>
-                <a:ea typeface="Yu Gothic" pitchFamily="34" charset="-122"/>
-                <a:cs typeface="Yu Gothic" pitchFamily="34" charset="-120"/>
-              </a:rPr>
-              <a:t>5ヶ月目</a:t>
-            </a:r>
-            <a:endParaRPr lang="en-US" sz="1200" dirty="0"/>
-          </a:p>
-        </p:txBody>
-      </p:sp>
-      <p:sp>
-        <p:nvSpPr>
-          <p:cNvPr id="22" name="Text 20"/>
-          <p:cNvSpPr txBox="1"/>
-          <p:nvPr/>
-        </p:nvSpPr>
-        <p:spPr>
-          <a:xfrm>
-            <a:off x="6044184" y="1920240"/>
-            <a:ext cx="1152144" cy="1005840"/>
-          </a:xfrm>
-          <a:prstGeom prst="rect">
-            <a:avLst/>
-          </a:prstGeom>
-          <a:noFill/>
-          <a:ln/>
-        </p:spPr>
-        <p:txBody>
-          <a:bodyPr wrap="square" lIns="0" tIns="0" rIns="0" bIns="0" rtlCol="0" anchor="ctr"/>
-          <a:lstStyle/>
-          <a:p>
-            <a:pPr algn="ctr" indent="0" marL="0">
-              <a:lnSpc>
-                <a:spcPts val="1600"/>
-              </a:lnSpc>
-              <a:buNone/>
-            </a:pPr>
-            <a:r>
-              <a:rPr lang="en-US" sz="1100" b="1" dirty="0">
-                <a:solidFill>
-                  <a:srgbClr val="6D2E46"/>
-                </a:solidFill>
-                <a:latin typeface="Yu Gothic" pitchFamily="34" charset="0"/>
-                <a:ea typeface="Yu Gothic" pitchFamily="34" charset="-122"/>
-                <a:cs typeface="Yu Gothic" pitchFamily="34" charset="-120"/>
-              </a:rPr>
-              <a:t>講座</a:t>
-            </a:r>
-            <a:endParaRPr lang="en-US" sz="1100" dirty="0"/>
-          </a:p>
-          <a:p>
-            <a:pPr algn="ctr" indent="0" marL="0">
-              <a:lnSpc>
-                <a:spcPts val="1600"/>
-              </a:lnSpc>
-              <a:buNone/>
-            </a:pPr>
-            <a:r>
-              <a:rPr lang="en-US" sz="1100" b="1" dirty="0">
-                <a:solidFill>
-                  <a:srgbClr val="6D2E46"/>
-                </a:solidFill>
-                <a:latin typeface="Yu Gothic" pitchFamily="34" charset="0"/>
-                <a:ea typeface="Yu Gothic" pitchFamily="34" charset="-122"/>
-                <a:cs typeface="Yu Gothic" pitchFamily="34" charset="-120"/>
-              </a:rPr>
-              <a:t>オンライン</a:t>
-            </a:r>
-            <a:endParaRPr lang="en-US" sz="1100" dirty="0"/>
-          </a:p>
-        </p:txBody>
-      </p:sp>
-      <p:sp>
-        <p:nvSpPr>
-          <p:cNvPr id="23" name="Text 21"/>
-          <p:cNvSpPr txBox="1"/>
-          <p:nvPr/>
-        </p:nvSpPr>
-        <p:spPr>
-          <a:xfrm>
-            <a:off x="5998464" y="3063240"/>
-            <a:ext cx="1243584" cy="274320"/>
-          </a:xfrm>
-          <a:prstGeom prst="rect">
-            <a:avLst/>
-          </a:prstGeom>
-          <a:noFill/>
-          <a:ln/>
-        </p:spPr>
-        <p:txBody>
-          <a:bodyPr wrap="square" lIns="0" tIns="0" rIns="0" bIns="0" rtlCol="0" anchor="ctr"/>
-          <a:lstStyle/>
-          <a:p>
-            <a:pPr algn="ctr" indent="0" marL="0">
-              <a:buNone/>
-            </a:pPr>
-            <a:r>
-              <a:rPr lang="en-US" sz="1100" dirty="0">
-                <a:solidFill>
-                  <a:srgbClr val="2B2B2B"/>
-                </a:solidFill>
-                <a:latin typeface="Yu Gothic" pitchFamily="34" charset="0"/>
-                <a:ea typeface="Yu Gothic" pitchFamily="34" charset="-122"/>
-                <a:cs typeface="Yu Gothic" pitchFamily="34" charset="-120"/>
-              </a:rPr>
-              <a:t>質問会</a:t>
-            </a:r>
-            <a:endParaRPr lang="en-US" sz="1100" dirty="0"/>
-          </a:p>
-        </p:txBody>
-      </p:sp>
-      <p:sp>
-        <p:nvSpPr>
-          <p:cNvPr id="24" name="Shape 22"/>
-          <p:cNvSpPr/>
-          <p:nvPr/>
-        </p:nvSpPr>
-        <p:spPr>
-          <a:xfrm>
-            <a:off x="7356348" y="1417320"/>
-            <a:ext cx="1243584" cy="2148840"/>
-          </a:xfrm>
-          <a:prstGeom prst="roundRect">
-            <a:avLst>
-              <a:gd name="adj" fmla="val 5882"/>
-            </a:avLst>
-          </a:prstGeom>
-          <a:solidFill>
-            <a:srgbClr val="F7F3F1"/>
-          </a:solidFill>
-          <a:ln/>
-        </p:spPr>
-      </p:sp>
-      <p:sp>
-        <p:nvSpPr>
-          <p:cNvPr id="25" name="Text 23"/>
-          <p:cNvSpPr txBox="1"/>
-          <p:nvPr/>
-        </p:nvSpPr>
-        <p:spPr>
-          <a:xfrm>
-            <a:off x="7356348" y="1554480"/>
-            <a:ext cx="1243584" cy="274320"/>
-          </a:xfrm>
-          <a:prstGeom prst="rect">
-            <a:avLst/>
-          </a:prstGeom>
-          <a:noFill/>
-          <a:ln/>
-        </p:spPr>
-        <p:txBody>
-          <a:bodyPr wrap="square" lIns="0" tIns="0" rIns="0" bIns="0" rtlCol="0" anchor="ctr"/>
-          <a:lstStyle/>
-          <a:p>
-            <a:pPr algn="ctr" indent="0" marL="0">
-              <a:buNone/>
-            </a:pPr>
-            <a:r>
-              <a:rPr lang="en-US" sz="1200" b="1" dirty="0">
-                <a:solidFill>
-                  <a:srgbClr val="7A6A6E"/>
-                </a:solidFill>
-                <a:latin typeface="Yu Gothic" pitchFamily="34" charset="0"/>
-                <a:ea typeface="Yu Gothic" pitchFamily="34" charset="-122"/>
-                <a:cs typeface="Yu Gothic" pitchFamily="34" charset="-120"/>
-              </a:rPr>
-              <a:t>6ヶ月目</a:t>
-            </a:r>
-            <a:endParaRPr lang="en-US" sz="1200" dirty="0"/>
-          </a:p>
-        </p:txBody>
-      </p:sp>
-      <p:sp>
-        <p:nvSpPr>
-          <p:cNvPr id="26" name="Text 24"/>
-          <p:cNvSpPr txBox="1"/>
-          <p:nvPr/>
-        </p:nvSpPr>
-        <p:spPr>
-          <a:xfrm>
-            <a:off x="7402068" y="1920240"/>
-            <a:ext cx="1152144" cy="1005840"/>
-          </a:xfrm>
-          <a:prstGeom prst="rect">
-            <a:avLst/>
-          </a:prstGeom>
-          <a:noFill/>
-          <a:ln/>
-        </p:spPr>
-        <p:txBody>
-          <a:bodyPr wrap="square" lIns="0" tIns="0" rIns="0" bIns="0" rtlCol="0" anchor="ctr"/>
-          <a:lstStyle/>
-          <a:p>
-            <a:pPr algn="ctr" indent="0" marL="0">
-              <a:lnSpc>
-                <a:spcPts val="1600"/>
-              </a:lnSpc>
-              <a:buNone/>
-            </a:pPr>
-            <a:r>
-              <a:rPr lang="en-US" sz="1100" b="1" dirty="0">
-                <a:solidFill>
-                  <a:srgbClr val="6D2E46"/>
-                </a:solidFill>
-                <a:latin typeface="Yu Gothic" pitchFamily="34" charset="0"/>
-                <a:ea typeface="Yu Gothic" pitchFamily="34" charset="-122"/>
-                <a:cs typeface="Yu Gothic" pitchFamily="34" charset="-120"/>
-              </a:rPr>
-              <a:t>講座</a:t>
-            </a:r>
-            <a:endParaRPr lang="en-US" sz="1100" dirty="0"/>
-          </a:p>
-          <a:p>
-            <a:pPr algn="ctr" indent="0" marL="0">
-              <a:lnSpc>
-                <a:spcPts val="1600"/>
-              </a:lnSpc>
-              <a:buNone/>
-            </a:pPr>
-            <a:r>
-              <a:rPr lang="en-US" sz="1100" b="1" dirty="0">
-                <a:solidFill>
-                  <a:srgbClr val="6D2E46"/>
-                </a:solidFill>
-                <a:latin typeface="Yu Gothic" pitchFamily="34" charset="0"/>
-                <a:ea typeface="Yu Gothic" pitchFamily="34" charset="-122"/>
-                <a:cs typeface="Yu Gothic" pitchFamily="34" charset="-120"/>
-              </a:rPr>
-              <a:t>オンライン</a:t>
-            </a:r>
-            <a:endParaRPr lang="en-US" sz="1100" dirty="0"/>
-          </a:p>
-        </p:txBody>
-      </p:sp>
-      <p:sp>
-        <p:nvSpPr>
-          <p:cNvPr id="27" name="Text 25"/>
-          <p:cNvSpPr txBox="1"/>
-          <p:nvPr/>
-        </p:nvSpPr>
-        <p:spPr>
-          <a:xfrm>
-            <a:off x="7356348" y="3063240"/>
-            <a:ext cx="1243584" cy="274320"/>
-          </a:xfrm>
-          <a:prstGeom prst="rect">
-            <a:avLst/>
-          </a:prstGeom>
-          <a:noFill/>
-          <a:ln/>
-        </p:spPr>
-        <p:txBody>
-          <a:bodyPr wrap="square" lIns="0" tIns="0" rIns="0" bIns="0" rtlCol="0" anchor="ctr"/>
-          <a:lstStyle/>
-          <a:p>
-            <a:pPr algn="ctr" indent="0" marL="0">
-              <a:buNone/>
-            </a:pPr>
-            <a:r>
-              <a:rPr lang="en-US" sz="1100" dirty="0">
-                <a:solidFill>
-                  <a:srgbClr val="2B2B2B"/>
-                </a:solidFill>
-                <a:latin typeface="Yu Gothic" pitchFamily="34" charset="0"/>
-                <a:ea typeface="Yu Gothic" pitchFamily="34" charset="-122"/>
-                <a:cs typeface="Yu Gothic" pitchFamily="34" charset="-120"/>
-              </a:rPr>
-              <a:t>質問会</a:t>
-            </a:r>
-            <a:endParaRPr lang="en-US" sz="1100" dirty="0"/>
-          </a:p>
-        </p:txBody>
-      </p:sp>
-      <p:sp>
-        <p:nvSpPr>
-          <p:cNvPr id="28" name="Shape 26"/>
-          <p:cNvSpPr/>
-          <p:nvPr/>
-        </p:nvSpPr>
-        <p:spPr>
-          <a:xfrm>
-            <a:off x="566928" y="3794760"/>
-            <a:ext cx="8010144" cy="868680"/>
-          </a:xfrm>
-          <a:prstGeom prst="roundRect">
-            <a:avLst>
-              <a:gd name="adj" fmla="val 8421"/>
-            </a:avLst>
-          </a:prstGeom>
-          <a:solidFill>
-            <a:srgbClr val="F7F3F1"/>
-          </a:solidFill>
-          <a:ln/>
-        </p:spPr>
-      </p:sp>
-      <p:sp>
-        <p:nvSpPr>
-          <p:cNvPr id="29" name="Text 27"/>
-          <p:cNvSpPr txBox="1"/>
-          <p:nvPr/>
-        </p:nvSpPr>
-        <p:spPr>
-          <a:xfrm>
-            <a:off x="841248" y="3794760"/>
-            <a:ext cx="7461504" cy="868680"/>
-          </a:xfrm>
-          <a:prstGeom prst="rect">
-            <a:avLst/>
-          </a:prstGeom>
-          <a:noFill/>
-          <a:ln/>
-        </p:spPr>
-        <p:txBody>
-          <a:bodyPr wrap="square" lIns="0" tIns="0" rIns="0" bIns="0" rtlCol="0" anchor="ctr"/>
-          <a:lstStyle/>
-          <a:p>
-            <a:pPr indent="0" marL="0">
-              <a:buNone/>
-            </a:pPr>
-            <a:r>
-              <a:rPr lang="en-US" sz="1400" b="1" dirty="0">
-                <a:solidFill>
-                  <a:srgbClr val="6D2E46"/>
-                </a:solidFill>
-                <a:latin typeface="Yu Gothic" pitchFamily="34" charset="0"/>
-                <a:ea typeface="Yu Gothic" pitchFamily="34" charset="-122"/>
-                <a:cs typeface="Yu Gothic" pitchFamily="34" charset="-120"/>
-              </a:rPr>
-              <a:t>個別のZoom面談は、ご契約後すぐと最終月の2回です。</a:t>
+              <a:t>迷われたら、個別相談でお聞きします。合わないほうを、はっきり申し上げます。</a:t>
             </a:r>
             <a:endParaRPr lang="en-US" sz="1400" dirty="0"/>
           </a:p>
@@ -10955,11 +10443,11 @@
         <p:spPr>
           <a:xfrm>
             <a:off x="566928" y="1325880"/>
-            <a:ext cx="3913632" cy="2011680"/>
+            <a:ext cx="3913632" cy="2148840"/>
           </a:xfrm>
           <a:prstGeom prst="roundRect">
             <a:avLst>
-              <a:gd name="adj" fmla="val 3636"/>
+              <a:gd name="adj" fmla="val 3404"/>
             </a:avLst>
           </a:prstGeom>
           <a:solidFill>
@@ -10976,7 +10464,7 @@
         </p:nvSpPr>
         <p:spPr>
           <a:xfrm>
-            <a:off x="841248" y="1536192"/>
+            <a:off x="841248" y="1517904"/>
             <a:ext cx="3383280" cy="292608"/>
           </a:xfrm>
           <a:prstGeom prst="rect">
@@ -10993,7 +10481,7 @@
               <a:buNone/>
             </a:pPr>
             <a:r>
-              <a:rPr lang="en-US" sz="1500" b="1" dirty="0">
+              <a:rPr lang="en-US" sz="1400" b="1" dirty="0">
                 <a:solidFill>
                   <a:srgbClr val="6D2E46"/>
                 </a:solidFill>
@@ -11001,9 +10489,9 @@
                 <a:ea typeface="Yu Gothic" pitchFamily="34" charset="-122"/>
                 <a:cs typeface="Yu Gothic" pitchFamily="34" charset="-120"/>
               </a:rPr>
-              <a:t>レギュラーコース</a:t>
-            </a:r>
-            <a:endParaRPr lang="en-US" sz="1500" dirty="0"/>
+              <a:t>AIマーケティング集中講座</a:t>
+            </a:r>
+            <a:endParaRPr lang="en-US" sz="1400" dirty="0"/>
           </a:p>
         </p:txBody>
       </p:sp>
@@ -11015,7 +10503,7 @@
         </p:nvSpPr>
         <p:spPr>
           <a:xfrm>
-            <a:off x="841248" y="1920240"/>
+            <a:off x="841248" y="1874520"/>
             <a:ext cx="3383280" cy="640080"/>
           </a:xfrm>
           <a:prstGeom prst="rect">
@@ -11032,7 +10520,7 @@
               <a:buNone/>
             </a:pPr>
             <a:r>
-              <a:rPr lang="en-US" sz="3200" b="1" dirty="0">
+              <a:rPr lang="en-US" sz="3400" b="1" dirty="0">
                 <a:solidFill>
                   <a:srgbClr val="6D2E46"/>
                 </a:solidFill>
@@ -11040,9 +10528,9 @@
                 <a:ea typeface="Yu Gothic" pitchFamily="34" charset="-122"/>
                 <a:cs typeface="Yu Gothic" pitchFamily="34" charset="-120"/>
               </a:rPr>
-              <a:t>398,000円</a:t>
-            </a:r>
-            <a:endParaRPr lang="en-US" sz="3200" dirty="0"/>
+              <a:t>88,000円</a:t>
+            </a:r>
+            <a:endParaRPr lang="en-US" sz="3400" dirty="0"/>
           </a:p>
         </p:txBody>
       </p:sp>
@@ -11054,7 +10542,7 @@
         </p:nvSpPr>
         <p:spPr>
           <a:xfrm>
-            <a:off x="841248" y="2697480"/>
+            <a:off x="841248" y="2633472"/>
             <a:ext cx="3383280" cy="292608"/>
           </a:xfrm>
           <a:prstGeom prst="rect">
@@ -11079,7 +10567,7 @@
                 <a:ea typeface="Yu Gothic" pitchFamily="34" charset="-122"/>
                 <a:cs typeface="Yu Gothic" pitchFamily="34" charset="-120"/>
               </a:rPr>
-              <a:t>定員10名</a:t>
+              <a:t>3ヶ月／定員20名</a:t>
             </a:r>
             <a:endParaRPr lang="en-US" sz="1400" dirty="0"/>
           </a:p>
@@ -11087,18 +10575,57 @@
       </p:sp>
       <p:sp>
         <p:nvSpPr>
-          <p:cNvPr id="7" name="Shape 5"/>
+          <p:cNvPr id="7" name="Text 5"/>
+          <p:cNvSpPr txBox="1"/>
+          <p:nvPr/>
+        </p:nvSpPr>
+        <p:spPr>
+          <a:xfrm>
+            <a:off x="841248" y="2999232"/>
+            <a:ext cx="3383280" cy="292608"/>
+          </a:xfrm>
+          <a:prstGeom prst="rect">
+            <a:avLst/>
+          </a:prstGeom>
+          <a:noFill/>
+          <a:ln/>
+        </p:spPr>
+        <p:txBody>
+          <a:bodyPr wrap="square" lIns="0" tIns="0" rIns="0" bIns="0" rtlCol="0" anchor="ctr"/>
+          <a:lstStyle/>
+          <a:p>
+            <a:pPr indent="0" marL="0">
+              <a:buNone/>
+            </a:pPr>
+            <a:r>
+              <a:rPr lang="en-US" sz="1300" dirty="0">
+                <a:solidFill>
+                  <a:srgbClr val="2B2B2B"/>
+                </a:solidFill>
+                <a:latin typeface="Yu Gothic" pitchFamily="34" charset="0"/>
+                <a:ea typeface="Yu Gothic" pitchFamily="34" charset="-122"/>
+                <a:cs typeface="Yu Gothic" pitchFamily="34" charset="-120"/>
+              </a:rPr>
+              <a:t>お支払いは一括です</a:t>
+            </a:r>
+            <a:endParaRPr lang="en-US" sz="1300" dirty="0"/>
+          </a:p>
+        </p:txBody>
+      </p:sp>
+      <p:sp>
+        <p:nvSpPr>
+          <p:cNvPr id="8" name="Shape 6"/>
           <p:cNvSpPr/>
           <p:nvPr/>
         </p:nvSpPr>
         <p:spPr>
           <a:xfrm>
             <a:off x="4663440" y="1325880"/>
-            <a:ext cx="3913632" cy="2011680"/>
+            <a:ext cx="3913632" cy="2148840"/>
           </a:xfrm>
           <a:prstGeom prst="roundRect">
             <a:avLst>
-              <a:gd name="adj" fmla="val 3636"/>
+              <a:gd name="adj" fmla="val 3404"/>
             </a:avLst>
           </a:prstGeom>
           <a:solidFill>
@@ -11109,13 +10636,91 @@
       </p:sp>
       <p:sp>
         <p:nvSpPr>
-          <p:cNvPr id="8" name="Text 6"/>
-          <p:cNvSpPr txBox="1"/>
-          <p:nvPr/>
-        </p:nvSpPr>
-        <p:spPr>
-          <a:xfrm>
-            <a:off x="4937760" y="1536192"/>
+          <p:cNvPr id="9" name="Text 7"/>
+          <p:cNvSpPr txBox="1"/>
+          <p:nvPr/>
+        </p:nvSpPr>
+        <p:spPr>
+          <a:xfrm>
+            <a:off x="4937760" y="1517904"/>
+            <a:ext cx="3474720" cy="292608"/>
+          </a:xfrm>
+          <a:prstGeom prst="rect">
+            <a:avLst/>
+          </a:prstGeom>
+          <a:noFill/>
+          <a:ln/>
+        </p:spPr>
+        <p:txBody>
+          <a:bodyPr wrap="square" lIns="0" tIns="0" rIns="0" bIns="0" rtlCol="0" anchor="ctr"/>
+          <a:lstStyle/>
+          <a:p>
+            <a:pPr indent="0" marL="0">
+              <a:buNone/>
+            </a:pPr>
+            <a:r>
+              <a:rPr lang="en-US" sz="1400" b="1" dirty="0">
+                <a:solidFill>
+                  <a:srgbClr val="6D2E46"/>
+                </a:solidFill>
+                <a:latin typeface="Yu Gothic" pitchFamily="34" charset="0"/>
+                <a:ea typeface="Yu Gothic" pitchFamily="34" charset="-122"/>
+                <a:cs typeface="Yu Gothic" pitchFamily="34" charset="-120"/>
+              </a:rPr>
+              <a:t>ファッション起業AIマスター講座</a:t>
+            </a:r>
+            <a:endParaRPr lang="en-US" sz="1400" dirty="0"/>
+          </a:p>
+        </p:txBody>
+      </p:sp>
+      <p:sp>
+        <p:nvSpPr>
+          <p:cNvPr id="10" name="Text 8"/>
+          <p:cNvSpPr txBox="1"/>
+          <p:nvPr/>
+        </p:nvSpPr>
+        <p:spPr>
+          <a:xfrm>
+            <a:off x="4937760" y="1874520"/>
+            <a:ext cx="3383280" cy="640080"/>
+          </a:xfrm>
+          <a:prstGeom prst="rect">
+            <a:avLst/>
+          </a:prstGeom>
+          <a:noFill/>
+          <a:ln/>
+        </p:spPr>
+        <p:txBody>
+          <a:bodyPr wrap="square" lIns="0" tIns="0" rIns="0" bIns="0" rtlCol="0" anchor="ctr"/>
+          <a:lstStyle/>
+          <a:p>
+            <a:pPr indent="0" marL="0">
+              <a:buNone/>
+            </a:pPr>
+            <a:r>
+              <a:rPr lang="en-US" sz="3400" b="1" dirty="0">
+                <a:solidFill>
+                  <a:srgbClr val="6D2E46"/>
+                </a:solidFill>
+                <a:latin typeface="Yu Gothic" pitchFamily="34" charset="0"/>
+                <a:ea typeface="Yu Gothic" pitchFamily="34" charset="-122"/>
+                <a:cs typeface="Yu Gothic" pitchFamily="34" charset="-120"/>
+              </a:rPr>
+              <a:t>330,000円</a:t>
+            </a:r>
+            <a:endParaRPr lang="en-US" sz="3400" dirty="0"/>
+          </a:p>
+        </p:txBody>
+      </p:sp>
+      <p:sp>
+        <p:nvSpPr>
+          <p:cNvPr id="11" name="Text 9"/>
+          <p:cNvSpPr txBox="1"/>
+          <p:nvPr/>
+        </p:nvSpPr>
+        <p:spPr>
+          <a:xfrm>
+            <a:off x="4937760" y="2633472"/>
             <a:ext cx="3383280" cy="292608"/>
           </a:xfrm>
           <a:prstGeom prst="rect">
@@ -11132,68 +10737,29 @@
               <a:buNone/>
             </a:pPr>
             <a:r>
-              <a:rPr lang="en-US" sz="1500" b="1" dirty="0">
-                <a:solidFill>
-                  <a:srgbClr val="6D2E46"/>
-                </a:solidFill>
-                <a:latin typeface="Yu Gothic" pitchFamily="34" charset="0"/>
-                <a:ea typeface="Yu Gothic" pitchFamily="34" charset="-122"/>
-                <a:cs typeface="Yu Gothic" pitchFamily="34" charset="-120"/>
-              </a:rPr>
-              <a:t>VIPコース</a:t>
-            </a:r>
-            <a:endParaRPr lang="en-US" sz="1500" dirty="0"/>
-          </a:p>
-        </p:txBody>
-      </p:sp>
-      <p:sp>
-        <p:nvSpPr>
-          <p:cNvPr id="9" name="Text 7"/>
-          <p:cNvSpPr txBox="1"/>
-          <p:nvPr/>
-        </p:nvSpPr>
-        <p:spPr>
-          <a:xfrm>
-            <a:off x="4937760" y="1920240"/>
-            <a:ext cx="3383280" cy="640080"/>
-          </a:xfrm>
-          <a:prstGeom prst="rect">
-            <a:avLst/>
-          </a:prstGeom>
-          <a:noFill/>
-          <a:ln/>
-        </p:spPr>
-        <p:txBody>
-          <a:bodyPr wrap="square" lIns="0" tIns="0" rIns="0" bIns="0" rtlCol="0" anchor="ctr"/>
-          <a:lstStyle/>
-          <a:p>
-            <a:pPr indent="0" marL="0">
-              <a:buNone/>
-            </a:pPr>
-            <a:r>
-              <a:rPr lang="en-US" sz="3200" b="1" dirty="0">
-                <a:solidFill>
-                  <a:srgbClr val="6D2E46"/>
-                </a:solidFill>
-                <a:latin typeface="Yu Gothic" pitchFamily="34" charset="0"/>
-                <a:ea typeface="Yu Gothic" pitchFamily="34" charset="-122"/>
-                <a:cs typeface="Yu Gothic" pitchFamily="34" charset="-120"/>
-              </a:rPr>
-              <a:t>660,000円</a:t>
-            </a:r>
-            <a:endParaRPr lang="en-US" sz="3200" dirty="0"/>
-          </a:p>
-        </p:txBody>
-      </p:sp>
-      <p:sp>
-        <p:nvSpPr>
-          <p:cNvPr id="10" name="Text 8"/>
-          <p:cNvSpPr txBox="1"/>
-          <p:nvPr/>
-        </p:nvSpPr>
-        <p:spPr>
-          <a:xfrm>
-            <a:off x="4937760" y="2697480"/>
+              <a:rPr lang="en-US" sz="1400" dirty="0">
+                <a:solidFill>
+                  <a:srgbClr val="7A6A6E"/>
+                </a:solidFill>
+                <a:latin typeface="Yu Gothic" pitchFamily="34" charset="0"/>
+                <a:ea typeface="Yu Gothic" pitchFamily="34" charset="-122"/>
+                <a:cs typeface="Yu Gothic" pitchFamily="34" charset="-120"/>
+              </a:rPr>
+              <a:t>6ヶ月／定員10名</a:t>
+            </a:r>
+            <a:endParaRPr lang="en-US" sz="1400" dirty="0"/>
+          </a:p>
+        </p:txBody>
+      </p:sp>
+      <p:sp>
+        <p:nvSpPr>
+          <p:cNvPr id="12" name="Text 10"/>
+          <p:cNvSpPr txBox="1"/>
+          <p:nvPr/>
+        </p:nvSpPr>
+        <p:spPr>
+          <a:xfrm>
+            <a:off x="4937760" y="2999232"/>
             <a:ext cx="3383280" cy="292608"/>
           </a:xfrm>
           <a:prstGeom prst="rect">
@@ -11210,29 +10776,29 @@
               <a:buNone/>
             </a:pPr>
             <a:r>
-              <a:rPr lang="en-US" sz="1400" dirty="0">
-                <a:solidFill>
-                  <a:srgbClr val="7A6A6E"/>
-                </a:solidFill>
-                <a:latin typeface="Yu Gothic" pitchFamily="34" charset="0"/>
-                <a:ea typeface="Yu Gothic" pitchFamily="34" charset="-122"/>
-                <a:cs typeface="Yu Gothic" pitchFamily="34" charset="-120"/>
-              </a:rPr>
-              <a:t>定員3名</a:t>
-            </a:r>
-            <a:endParaRPr lang="en-US" sz="1400" dirty="0"/>
-          </a:p>
-        </p:txBody>
-      </p:sp>
-      <p:sp>
-        <p:nvSpPr>
-          <p:cNvPr id="11" name="Text 9"/>
-          <p:cNvSpPr txBox="1"/>
-          <p:nvPr/>
-        </p:nvSpPr>
-        <p:spPr>
-          <a:xfrm>
-            <a:off x="566928" y="3520440"/>
+              <a:rPr lang="en-US" sz="1300" dirty="0">
+                <a:solidFill>
+                  <a:srgbClr val="2B2B2B"/>
+                </a:solidFill>
+                <a:latin typeface="Yu Gothic" pitchFamily="34" charset="0"/>
+                <a:ea typeface="Yu Gothic" pitchFamily="34" charset="-122"/>
+                <a:cs typeface="Yu Gothic" pitchFamily="34" charset="-120"/>
+              </a:rPr>
+              <a:t>6回払いまで分割できます</a:t>
+            </a:r>
+            <a:endParaRPr lang="en-US" sz="1300" dirty="0"/>
+          </a:p>
+        </p:txBody>
+      </p:sp>
+      <p:sp>
+        <p:nvSpPr>
+          <p:cNvPr id="13" name="Text 11"/>
+          <p:cNvSpPr txBox="1"/>
+          <p:nvPr/>
+        </p:nvSpPr>
+        <p:spPr>
+          <a:xfrm>
+            <a:off x="566928" y="3657600"/>
             <a:ext cx="8010144" cy="914400"/>
           </a:xfrm>
           <a:prstGeom prst="rect">
@@ -11260,7 +10826,7 @@
                 <a:ea typeface="Yu Gothic" pitchFamily="34" charset="-122"/>
                 <a:cs typeface="Yu Gothic" pitchFamily="34" charset="-120"/>
               </a:rPr>
-              <a:t>レギュラーは、講座6回・質問会6回・個別Zoom 2回・ランチ会で15回。1回あたり約26,500円です。</a:t>
+              <a:t>金額を伏せたままお集めしたくないので、この場で全部お伝えしました。</a:t>
             </a:r>
             <a:endParaRPr lang="en-US" sz="1400" dirty="0"/>
           </a:p>
@@ -11280,7 +10846,7 @@
                 <a:ea typeface="Yu Gothic" pitchFamily="34" charset="-122"/>
                 <a:cs typeface="Yu Gothic" pitchFamily="34" charset="-120"/>
               </a:rPr>
-              <a:t>お支払いは一括をお願いしています。分割をご希望の方はご相談ください。</a:t>
+              <a:t>今日お決めいただく必要はありません。</a:t>
             </a:r>
             <a:endParaRPr lang="en-US" sz="1400" dirty="0"/>
           </a:p>
@@ -11388,7 +10954,7 @@
         <p:spPr>
           <a:xfrm>
             <a:off x="886968" y="1371600"/>
-            <a:ext cx="2743200" cy="777240"/>
+            <a:ext cx="2377440" cy="777240"/>
           </a:xfrm>
           <a:prstGeom prst="rect">
             <a:avLst/>
@@ -11426,24 +10992,24 @@
         </p:nvSpPr>
         <p:spPr>
           <a:xfrm>
-            <a:off x="3767328" y="1371600"/>
-            <a:ext cx="4443984" cy="777240"/>
-          </a:xfrm>
-          <a:prstGeom prst="rect">
-            <a:avLst/>
-          </a:prstGeom>
-          <a:noFill/>
-          <a:ln/>
-        </p:spPr>
-        <p:txBody>
-          <a:bodyPr wrap="square" lIns="0" tIns="0" rIns="0" bIns="0" rtlCol="0" anchor="ctr"/>
-          <a:lstStyle/>
-          <a:p>
-            <a:pPr indent="0" marL="0">
-              <a:buNone/>
-            </a:pPr>
-            <a:r>
-              <a:rPr lang="en-US" sz="1700" b="1" dirty="0">
+            <a:off x="3401568" y="1371600"/>
+            <a:ext cx="4809744" cy="777240"/>
+          </a:xfrm>
+          <a:prstGeom prst="rect">
+            <a:avLst/>
+          </a:prstGeom>
+          <a:noFill/>
+          <a:ln/>
+        </p:spPr>
+        <p:txBody>
+          <a:bodyPr wrap="square" lIns="0" tIns="0" rIns="0" bIns="0" rtlCol="0" anchor="ctr"/>
+          <a:lstStyle/>
+          <a:p>
+            <a:pPr indent="0" marL="0">
+              <a:buNone/>
+            </a:pPr>
+            <a:r>
+              <a:rPr lang="en-US" sz="1500" b="1" dirty="0">
                 <a:solidFill>
                   <a:srgbClr val="6D2E46"/>
                 </a:solidFill>
@@ -11451,9 +11017,9 @@
                 <a:ea typeface="Yu Gothic" pitchFamily="34" charset="-122"/>
                 <a:cs typeface="Yu Gothic" pitchFamily="34" charset="-120"/>
               </a:rPr>
-              <a:t>2026年10月10日（土）</a:t>
-            </a:r>
-            <a:endParaRPr lang="en-US" sz="1700" dirty="0"/>
+              <a:t>2026年10月12日（月）</a:t>
+            </a:r>
+            <a:endParaRPr lang="en-US" sz="1500" dirty="0"/>
           </a:p>
         </p:txBody>
       </p:sp>
@@ -11488,7 +11054,7 @@
         <p:spPr>
           <a:xfrm>
             <a:off x="886968" y="2286000"/>
-            <a:ext cx="2743200" cy="777240"/>
+            <a:ext cx="2377440" cy="777240"/>
           </a:xfrm>
           <a:prstGeom prst="rect">
             <a:avLst/>
@@ -11526,24 +11092,24 @@
         </p:nvSpPr>
         <p:spPr>
           <a:xfrm>
-            <a:off x="3767328" y="2286000"/>
-            <a:ext cx="4443984" cy="777240"/>
-          </a:xfrm>
-          <a:prstGeom prst="rect">
-            <a:avLst/>
-          </a:prstGeom>
-          <a:noFill/>
-          <a:ln/>
-        </p:spPr>
-        <p:txBody>
-          <a:bodyPr wrap="square" lIns="0" tIns="0" rIns="0" bIns="0" rtlCol="0" anchor="ctr"/>
-          <a:lstStyle/>
-          <a:p>
-            <a:pPr indent="0" marL="0">
-              <a:buNone/>
-            </a:pPr>
-            <a:r>
-              <a:rPr lang="en-US" sz="1700" b="1" dirty="0">
+            <a:off x="3401568" y="2286000"/>
+            <a:ext cx="4809744" cy="777240"/>
+          </a:xfrm>
+          <a:prstGeom prst="rect">
+            <a:avLst/>
+          </a:prstGeom>
+          <a:noFill/>
+          <a:ln/>
+        </p:spPr>
+        <p:txBody>
+          <a:bodyPr wrap="square" lIns="0" tIns="0" rIns="0" bIns="0" rtlCol="0" anchor="ctr"/>
+          <a:lstStyle/>
+          <a:p>
+            <a:pPr indent="0" marL="0">
+              <a:buNone/>
+            </a:pPr>
+            <a:r>
+              <a:rPr lang="en-US" sz="1500" b="1" dirty="0">
                 <a:solidFill>
                   <a:srgbClr val="6D2E46"/>
                 </a:solidFill>
@@ -11551,9 +11117,9 @@
                 <a:ea typeface="Yu Gothic" pitchFamily="34" charset="-122"/>
                 <a:cs typeface="Yu Gothic" pitchFamily="34" charset="-120"/>
               </a:rPr>
-              <a:t>2026年10月15日（木）</a:t>
-            </a:r>
-            <a:endParaRPr lang="en-US" sz="1700" dirty="0"/>
+              <a:t>2026年10月13日（火）</a:t>
+            </a:r>
+            <a:endParaRPr lang="en-US" sz="1500" dirty="0"/>
           </a:p>
         </p:txBody>
       </p:sp>
@@ -11588,7 +11154,7 @@
         <p:spPr>
           <a:xfrm>
             <a:off x="886968" y="3200400"/>
-            <a:ext cx="2743200" cy="777240"/>
+            <a:ext cx="2377440" cy="777240"/>
           </a:xfrm>
           <a:prstGeom prst="rect">
             <a:avLst/>
@@ -11612,7 +11178,7 @@
                 <a:ea typeface="Yu Gothic" pitchFamily="34" charset="-122"/>
                 <a:cs typeface="Yu Gothic" pitchFamily="34" charset="-120"/>
               </a:rPr>
-              <a:t>VIPコース</a:t>
+              <a:t>定員</a:t>
             </a:r>
             <a:endParaRPr lang="en-US" sz="1500" dirty="0"/>
           </a:p>
@@ -11626,24 +11192,24 @@
         </p:nvSpPr>
         <p:spPr>
           <a:xfrm>
-            <a:off x="3767328" y="3200400"/>
-            <a:ext cx="4443984" cy="777240"/>
-          </a:xfrm>
-          <a:prstGeom prst="rect">
-            <a:avLst/>
-          </a:prstGeom>
-          <a:noFill/>
-          <a:ln/>
-        </p:spPr>
-        <p:txBody>
-          <a:bodyPr wrap="square" lIns="0" tIns="0" rIns="0" bIns="0" rtlCol="0" anchor="ctr"/>
-          <a:lstStyle/>
-          <a:p>
-            <a:pPr indent="0" marL="0">
-              <a:buNone/>
-            </a:pPr>
-            <a:r>
-              <a:rPr lang="en-US" sz="1700" b="1" dirty="0">
+            <a:off x="3401568" y="3200400"/>
+            <a:ext cx="4809744" cy="777240"/>
+          </a:xfrm>
+          <a:prstGeom prst="rect">
+            <a:avLst/>
+          </a:prstGeom>
+          <a:noFill/>
+          <a:ln/>
+        </p:spPr>
+        <p:txBody>
+          <a:bodyPr wrap="square" lIns="0" tIns="0" rIns="0" bIns="0" rtlCol="0" anchor="ctr"/>
+          <a:lstStyle/>
+          <a:p>
+            <a:pPr indent="0" marL="0">
+              <a:buNone/>
+            </a:pPr>
+            <a:r>
+              <a:rPr lang="en-US" sz="1500" b="1" dirty="0">
                 <a:solidFill>
                   <a:srgbClr val="6D2E46"/>
                 </a:solidFill>
@@ -11651,9 +11217,9 @@
                 <a:ea typeface="Yu Gothic" pitchFamily="34" charset="-122"/>
                 <a:cs typeface="Yu Gothic" pitchFamily="34" charset="-120"/>
               </a:rPr>
-              <a:t>定員3名。埋まり次第、締め切ります</a:t>
-            </a:r>
-            <a:endParaRPr lang="en-US" sz="1700" dirty="0"/>
+              <a:t>AIマーケティング集中講座 20名／ファッション起業AIマスター講座 10名</a:t>
+            </a:r>
+            <a:endParaRPr lang="en-US" sz="1500" dirty="0"/>
           </a:p>
         </p:txBody>
       </p:sp>
@@ -11666,33 +11232,33 @@
         <p:spPr>
           <a:xfrm>
             <a:off x="566928" y="4206240"/>
-            <a:ext cx="8010144" cy="365760"/>
-          </a:xfrm>
-          <a:prstGeom prst="rect">
-            <a:avLst/>
-          </a:prstGeom>
-          <a:noFill/>
-          <a:ln/>
-        </p:spPr>
-        <p:txBody>
-          <a:bodyPr wrap="square" lIns="0" tIns="0" rIns="0" bIns="0" rtlCol="0" anchor="ctr"/>
-          <a:lstStyle/>
-          <a:p>
-            <a:pPr indent="0" marL="0">
-              <a:buNone/>
-            </a:pPr>
-            <a:r>
-              <a:rPr lang="en-US" sz="1300" dirty="0">
-                <a:solidFill>
-                  <a:srgbClr val="2B2B2B"/>
-                </a:solidFill>
-                <a:latin typeface="Yu Gothic" pitchFamily="34" charset="0"/>
-                <a:ea typeface="Yu Gothic" pitchFamily="34" charset="-122"/>
-                <a:cs typeface="Yu Gothic" pitchFamily="34" charset="-120"/>
-              </a:rPr>
-              <a:t>毎月お会いして、Zoomでも随時お受けするので、3名がお約束を守れる限界です。</a:t>
-            </a:r>
-            <a:endParaRPr lang="en-US" sz="1300" dirty="0"/>
+            <a:ext cx="8010144" cy="457200"/>
+          </a:xfrm>
+          <a:prstGeom prst="rect">
+            <a:avLst/>
+          </a:prstGeom>
+          <a:noFill/>
+          <a:ln/>
+        </p:spPr>
+        <p:txBody>
+          <a:bodyPr wrap="square" lIns="0" tIns="0" rIns="0" bIns="0" rtlCol="0" anchor="ctr"/>
+          <a:lstStyle/>
+          <a:p>
+            <a:pPr indent="0" marL="0">
+              <a:buNone/>
+            </a:pPr>
+            <a:r>
+              <a:rPr lang="en-US" sz="1400" b="1" dirty="0">
+                <a:solidFill>
+                  <a:srgbClr val="6D2E46"/>
+                </a:solidFill>
+                <a:latin typeface="Yu Gothic" pitchFamily="34" charset="0"/>
+                <a:ea typeface="Yu Gothic" pitchFamily="34" charset="-122"/>
+                <a:cs typeface="Yu Gothic" pitchFamily="34" charset="-120"/>
+              </a:rPr>
+              <a:t>締切の翌日が開講です。お手続きの都合がある方は、早めにご連絡ください。</a:t>
+            </a:r>
+            <a:endParaRPr lang="en-US" sz="1400" dirty="0"/>
           </a:p>
         </p:txBody>
       </p:sp>
@@ -12055,7 +11621,7 @@
                 <a:ea typeface="Yu Gothic" pitchFamily="34" charset="-122"/>
                 <a:cs typeface="Yu Gothic" pitchFamily="34" charset="-120"/>
               </a:rPr>
-              <a:t>VIPの方には、その回のぶんを個別でおぎないます</a:t>
+              <a:t>ファッション起業AIマスター講座の方は、個別サポートでおぎないます</a:t>
             </a:r>
             <a:endParaRPr lang="en-US" sz="1500" dirty="0"/>
           </a:p>

--- a/運用/スライド/説明会_20260916.pptx
+++ b/運用/スライド/説明会_20260916.pptx
@@ -3245,7 +3245,7 @@
                 <a:ea typeface="Yu Gothic" pitchFamily="34" charset="-122"/>
                 <a:cs typeface="Yu Gothic" pitchFamily="34" charset="-120"/>
               </a:rPr>
-              <a:t>ファッション起業AIマスター講座</a:t>
+              <a:t>ファッション起業アカデミア　講座説明会</a:t>
             </a:r>
             <a:endParaRPr lang="en-US" sz="1400" dirty="0"/>
           </a:p>
@@ -9184,7 +9184,7 @@
                           <a:ea typeface="Yu Gothic" pitchFamily="34" charset="-122"/>
                           <a:cs typeface="Yu Gothic" pitchFamily="34" charset="-120"/>
                         </a:rPr>
-                        <a:t>3回（1回3時間程度・東京）</a:t>
+                        <a:t>3回（東京・オンライン可）</a:t>
                       </a:r>
                       <a:endParaRPr lang="en-US" sz="1200" dirty="0">
                         <a:latin typeface="Yu Gothic" charset="0"/>
@@ -9836,8 +9836,47 @@
         </p:nvSpPr>
         <p:spPr>
           <a:xfrm>
-            <a:off x="566928" y="4160520"/>
-            <a:ext cx="8010144" cy="457200"/>
+            <a:off x="566928" y="4261104"/>
+            <a:ext cx="8010144" cy="292608"/>
+          </a:xfrm>
+          <a:prstGeom prst="rect">
+            <a:avLst/>
+          </a:prstGeom>
+          <a:noFill/>
+          <a:ln/>
+        </p:spPr>
+        <p:txBody>
+          <a:bodyPr wrap="square" lIns="0" tIns="0" rIns="0" bIns="0" rtlCol="0" anchor="ctr"/>
+          <a:lstStyle/>
+          <a:p>
+            <a:pPr indent="0" marL="0">
+              <a:buNone/>
+            </a:pPr>
+            <a:r>
+              <a:rPr lang="en-US" sz="1100" dirty="0">
+                <a:solidFill>
+                  <a:srgbClr val="7A6A6E"/>
+                </a:solidFill>
+                <a:latin typeface="Yu Gothic" pitchFamily="34" charset="0"/>
+                <a:ea typeface="Yu Gothic" pitchFamily="34" charset="-122"/>
+                <a:cs typeface="Yu Gothic" pitchFamily="34" charset="-120"/>
+              </a:rPr>
+              <a:t>対面ワークショップは1回3時間程度。東京に来られない方は、オンラインでご参加いただけます。</a:t>
+            </a:r>
+            <a:endParaRPr lang="en-US" sz="1100" dirty="0"/>
+          </a:p>
+        </p:txBody>
+      </p:sp>
+      <p:sp>
+        <p:nvSpPr>
+          <p:cNvPr id="5" name="Text 2"/>
+          <p:cNvSpPr txBox="1"/>
+          <p:nvPr/>
+        </p:nvSpPr>
+        <p:spPr>
+          <a:xfrm>
+            <a:off x="566928" y="4572000"/>
+            <a:ext cx="8010144" cy="411480"/>
           </a:xfrm>
           <a:prstGeom prst="rect">
             <a:avLst/>
@@ -10228,8 +10267,8 @@
         </p:nvSpPr>
         <p:spPr>
           <a:xfrm>
-            <a:off x="4937760" y="2468880"/>
-            <a:ext cx="3383280" cy="1280160"/>
+            <a:off x="4937760" y="2395728"/>
+            <a:ext cx="3383280" cy="1554480"/>
           </a:xfrm>
           <a:prstGeom prst="rect">
             <a:avLst/>
@@ -10243,7 +10282,7 @@
           <a:p>
             <a:pPr indent="0" marL="0">
               <a:lnSpc>
-                <a:spcPts val="2600"/>
+                <a:spcPts val="2500"/>
               </a:lnSpc>
               <a:buNone/>
             </a:pPr>
@@ -10263,7 +10302,7 @@
           <a:p>
             <a:pPr indent="0" marL="0">
               <a:lnSpc>
-                <a:spcPts val="2600"/>
+                <a:spcPts val="2500"/>
               </a:lnSpc>
               <a:buNone/>
             </a:pPr>
@@ -10276,6 +10315,26 @@
                 <a:ea typeface="Yu Gothic" pitchFamily="34" charset="-122"/>
                 <a:cs typeface="Yu Gothic" pitchFamily="34" charset="-120"/>
               </a:rPr>
+              <a:t>（オンライン参加もできます）</a:t>
+            </a:r>
+            <a:endParaRPr lang="en-US" sz="1400" dirty="0"/>
+          </a:p>
+          <a:p>
+            <a:pPr indent="0" marL="0">
+              <a:lnSpc>
+                <a:spcPts val="2500"/>
+              </a:lnSpc>
+              <a:buNone/>
+            </a:pPr>
+            <a:r>
+              <a:rPr lang="en-US" sz="1400" dirty="0">
+                <a:solidFill>
+                  <a:srgbClr val="2B2B2B"/>
+                </a:solidFill>
+                <a:latin typeface="Yu Gothic" pitchFamily="34" charset="0"/>
+                <a:ea typeface="Yu Gothic" pitchFamily="34" charset="-122"/>
+                <a:cs typeface="Yu Gothic" pitchFamily="34" charset="-120"/>
+              </a:rPr>
               <a:t>6ヶ月、オンライン8回。</a:t>
             </a:r>
             <a:endParaRPr lang="en-US" sz="1400" dirty="0"/>
@@ -10283,7 +10342,7 @@
           <a:p>
             <a:pPr indent="0" marL="0">
               <a:lnSpc>
-                <a:spcPts val="2600"/>
+                <a:spcPts val="2500"/>
               </a:lnSpc>
               <a:buNone/>
             </a:pPr>

--- a/運用/スライド/説明会_20260916.pptx
+++ b/運用/スライド/説明会_20260916.pptx
@@ -10416,7 +10416,7 @@
                 <a:ea typeface="Yu Gothic" pitchFamily="34" charset="-122"/>
                 <a:cs typeface="Yu Gothic" pitchFamily="34" charset="-120"/>
               </a:rPr>
-              <a:t>迷われたら、個別相談でお聞きします。合わないほうを、はっきり申し上げます。</a:t>
+              <a:t>マスター講座は定員10名です。詳しいご案内は、個別相談でお話ししています。</a:t>
             </a:r>
             <a:endParaRPr lang="en-US" sz="1400" dirty="0"/>
           </a:p>
@@ -10740,24 +10740,27 @@
         </p:nvSpPr>
         <p:spPr>
           <a:xfrm>
-            <a:off x="4937760" y="1874520"/>
-            <a:ext cx="3383280" cy="640080"/>
-          </a:xfrm>
-          <a:prstGeom prst="rect">
-            <a:avLst/>
-          </a:prstGeom>
-          <a:noFill/>
-          <a:ln/>
-        </p:spPr>
-        <p:txBody>
-          <a:bodyPr wrap="square" lIns="0" tIns="0" rIns="0" bIns="0" rtlCol="0" anchor="ctr"/>
-          <a:lstStyle/>
-          <a:p>
-            <a:pPr indent="0" marL="0">
-              <a:buNone/>
-            </a:pPr>
-            <a:r>
-              <a:rPr lang="en-US" sz="3400" b="1" dirty="0">
+            <a:off x="4937760" y="1847088"/>
+            <a:ext cx="3383280" cy="731520"/>
+          </a:xfrm>
+          <a:prstGeom prst="rect">
+            <a:avLst/>
+          </a:prstGeom>
+          <a:noFill/>
+          <a:ln/>
+        </p:spPr>
+        <p:txBody>
+          <a:bodyPr wrap="square" lIns="0" tIns="0" rIns="0" bIns="0" rtlCol="0" anchor="ctr"/>
+          <a:lstStyle/>
+          <a:p>
+            <a:pPr indent="0" marL="0">
+              <a:lnSpc>
+                <a:spcPts val="3000"/>
+              </a:lnSpc>
+              <a:buNone/>
+            </a:pPr>
+            <a:r>
+              <a:rPr lang="en-US" sz="1900" b="1" dirty="0">
                 <a:solidFill>
                   <a:srgbClr val="6D2E46"/>
                 </a:solidFill>
@@ -10765,9 +10768,29 @@
                 <a:ea typeface="Yu Gothic" pitchFamily="34" charset="-122"/>
                 <a:cs typeface="Yu Gothic" pitchFamily="34" charset="-120"/>
               </a:rPr>
-              <a:t>330,000円</a:t>
-            </a:r>
-            <a:endParaRPr lang="en-US" sz="3400" dirty="0"/>
+              <a:t>受講料は、個別相談で</a:t>
+            </a:r>
+            <a:endParaRPr lang="en-US" sz="1900" dirty="0"/>
+          </a:p>
+          <a:p>
+            <a:pPr indent="0" marL="0">
+              <a:lnSpc>
+                <a:spcPts val="3000"/>
+              </a:lnSpc>
+              <a:buNone/>
+            </a:pPr>
+            <a:r>
+              <a:rPr lang="en-US" sz="1900" b="1" dirty="0">
+                <a:solidFill>
+                  <a:srgbClr val="6D2E46"/>
+                </a:solidFill>
+                <a:latin typeface="Yu Gothic" pitchFamily="34" charset="0"/>
+                <a:ea typeface="Yu Gothic" pitchFamily="34" charset="-122"/>
+                <a:cs typeface="Yu Gothic" pitchFamily="34" charset="-120"/>
+              </a:rPr>
+              <a:t>お伝えしています</a:t>
+            </a:r>
+            <a:endParaRPr lang="en-US" sz="1900" dirty="0"/>
           </a:p>
         </p:txBody>
       </p:sp>
@@ -10843,7 +10866,7 @@
                 <a:ea typeface="Yu Gothic" pitchFamily="34" charset="-122"/>
                 <a:cs typeface="Yu Gothic" pitchFamily="34" charset="-120"/>
               </a:rPr>
-              <a:t>6回払いまで分割できます</a:t>
+              <a:t>分割のお支払いもできます</a:t>
             </a:r>
             <a:endParaRPr lang="en-US" sz="1300" dirty="0"/>
           </a:p>
@@ -10885,7 +10908,7 @@
                 <a:ea typeface="Yu Gothic" pitchFamily="34" charset="-122"/>
                 <a:cs typeface="Yu Gothic" pitchFamily="34" charset="-120"/>
               </a:rPr>
-              <a:t>金額を伏せたままお集めしたくないので、この場で全部お伝えしました。</a:t>
+              <a:t>集中講座の金額は、この場ではっきりお伝えしました。</a:t>
             </a:r>
             <a:endParaRPr lang="en-US" sz="1400" dirty="0"/>
           </a:p>
@@ -10905,7 +10928,7 @@
                 <a:ea typeface="Yu Gothic" pitchFamily="34" charset="-122"/>
                 <a:cs typeface="Yu Gothic" pitchFamily="34" charset="-120"/>
               </a:rPr>
-              <a:t>今日お決めいただく必要はありません。</a:t>
+              <a:t>マスター講座は人数が少ないので、個別にお話ししています。今日お決めいただく必要はありません。</a:t>
             </a:r>
             <a:endParaRPr lang="en-US" sz="1400" dirty="0"/>
           </a:p>
